--- a/lecons/F2T/04_F2T_L1_P4_Equatorial_Human_Activities.pptx
+++ b/lecons/F2T/04_F2T_L1_P4_Equatorial_Human_Activities.pptx
@@ -59,9 +59,10 @@
     <p:sldId id="307" r:id="rId53"/>
     <p:sldId id="308" r:id="rId54"/>
     <p:sldId id="309" r:id="rId55"/>
+    <p:sldId id="310" r:id="rId56"/>
   </p:sldIdLst>
   <p:notesMasterIdLst>
-    <p:notesMasterId r:id="rId56"/>
+    <p:notesMasterId r:id="rId57"/>
   </p:notesMasterIdLst>
   <p:sldSz cx="12192000" cy="6858000"/>
   <p:notesSz cx="6858000" cy="12192000"/>
@@ -643,7 +644,7 @@
           <a:p>
             <a:r>
               <a:rPr lang="en-US" dirty="0"/>
-              <a:t>Listen carefully to this situation from real life. Paul's grandfather lives near Sangmélima. Every few years he clears a new piece of forest, burns it and plants cassava and plantains. Near the town, a big company grows oil palm on a very large farm. Think about it, because I am going to ask you some questions.</a:t>
+              <a:t>Listen carefully to this situation from real life. Paul's grandfather lives near Sangmélima. Every few years he clears a new piece of forest, burns it and plants cassava. Near the town, a company grows oil palm on a very large farm. Paul asks: "Why does grandfather keep moving his farm, and what other work do people do in the forest?" Think about it, because I am going to ask you some questions.</a:t>
             </a:r>
             <a:endParaRPr lang="en-US" dirty="0"/>
           </a:p>
@@ -819,7 +820,7 @@
           <a:p>
             <a:r>
               <a:rPr lang="en-US" dirty="0"/>
-              <a:t>Good. We want to know the different ways people farm in the forest region.</a:t>
+              <a:t>Good. Paul does not understand why his grandfather moves his farm and what other activities exist in the forest.</a:t>
             </a:r>
             <a:endParaRPr lang="en-US" dirty="0"/>
           </a:p>
@@ -907,7 +908,7 @@
           <a:p>
             <a:r>
               <a:rPr lang="en-US" dirty="0"/>
-              <a:t>Question 2: What does the grandfather do every few years? Think for a moment, then raise your hand to answer.</a:t>
+              <a:t>Question 2: What does the grandfather plant? Think for a moment, then raise your hand to answer.</a:t>
             </a:r>
             <a:endParaRPr lang="en-US" dirty="0"/>
           </a:p>
@@ -995,7 +996,7 @@
           <a:p>
             <a:r>
               <a:rPr lang="en-US" dirty="0"/>
-              <a:t>Good. He clears and burns a new piece of forest to farm.</a:t>
+              <a:t>Good. Cassava.</a:t>
             </a:r>
             <a:endParaRPr lang="en-US" dirty="0"/>
           </a:p>
@@ -1083,7 +1084,7 @@
           <a:p>
             <a:r>
               <a:rPr lang="en-US" dirty="0"/>
-              <a:t>Question 3: How is the company farm different? Think for a moment, then raise your hand to answer.</a:t>
+              <a:t>Question 3: What does the company grow? Think for a moment, then raise your hand to answer.</a:t>
             </a:r>
             <a:endParaRPr lang="en-US" dirty="0"/>
           </a:p>
@@ -1171,7 +1172,7 @@
           <a:p>
             <a:r>
               <a:rPr lang="en-US" dirty="0"/>
-              <a:t>Good. It is very large, it grows one crop and it sells the harvest.</a:t>
+              <a:t>Good. Oil palm, on a very large farm (plantation).</a:t>
             </a:r>
             <a:endParaRPr lang="en-US" dirty="0"/>
           </a:p>
@@ -1435,7 +1436,7 @@
           <a:p>
             <a:r>
               <a:rPr lang="en-US" dirty="0"/>
-              <a:t>Activity 1. Look carefully at this picture: a piece of forest cleared and burnt for farming. Observe every detail before I ask the question.</a:t>
+              <a:t>Activity 1. Look carefully at this picture: a cleared piece of forest. Observe every detail before I ask the question.</a:t>
             </a:r>
             <a:endParaRPr lang="en-US" dirty="0"/>
           </a:p>
@@ -1611,7 +1612,7 @@
           <a:p>
             <a:r>
               <a:rPr lang="en-US" dirty="0"/>
-              <a:t>Here is the question for Activity 1: What is this farmer preparing? Why does he move to a new place after a few years? Take one minute to think and write your answer in your rough notebook.</a:t>
+              <a:t>Here is the question for Activity 1: Why does the farmer move to a new place after a few years? Take one minute to think and write your answer in your rough notebook.</a:t>
             </a:r>
             <a:endParaRPr lang="en-US" dirty="0"/>
           </a:p>
@@ -1699,7 +1700,7 @@
           <a:p>
             <a:r>
               <a:rPr lang="en-US" dirty="0"/>
-              <a:t>Let us check the answer together. He is preparing a farm by slash and burn. After a few years the soil becomes poor, so he moves: this is shifting cultivation.</a:t>
+              <a:t>Let us check the answer together. The soil becomes poor: this is shifting cultivation.</a:t>
             </a:r>
             <a:endParaRPr lang="en-US" dirty="0"/>
           </a:p>
@@ -1787,7 +1788,7 @@
           <a:p>
             <a:r>
               <a:rPr lang="en-US" dirty="0"/>
-              <a:t>Activity 2. Look carefully at this picture: a farm with cassava and bananas. Observe every detail before I ask the question.</a:t>
+              <a:t>Activity 2. Look carefully at this picture: a food crop farm. Observe every detail before I ask the question.</a:t>
             </a:r>
             <a:endParaRPr lang="en-US" dirty="0"/>
           </a:p>
@@ -1875,7 +1876,7 @@
           <a:p>
             <a:r>
               <a:rPr lang="en-US" dirty="0"/>
-              <a:t>Here is the question for Activity 2: Name three food crops grown in the forest region. Take one minute to think and write your answer in your rough notebook.</a:t>
+              <a:t>Here is the question for Activity 2: Name two food crops of the forest region. Take one minute to think and write your answer in your rough notebook.</a:t>
             </a:r>
             <a:endParaRPr lang="en-US" dirty="0"/>
           </a:p>
@@ -1963,7 +1964,7 @@
           <a:p>
             <a:r>
               <a:rPr lang="en-US" dirty="0"/>
-              <a:t>Let us check the answer together. Cassava, plantains and cocoyams (also maize and groundnuts).</a:t>
+              <a:t>Let us check the answer together. Cassava and plantains (also cocoyams).</a:t>
             </a:r>
             <a:endParaRPr lang="en-US" dirty="0"/>
           </a:p>
@@ -2051,7 +2052,7 @@
           <a:p>
             <a:r>
               <a:rPr lang="en-US" dirty="0"/>
-              <a:t>Activity 3. Look carefully at this picture: an oil palm plantation seen from the air. Observe every detail before I ask the question.</a:t>
+              <a:t>Activity 3. Look carefully at this picture: oil palms on a large farm. Observe every detail before I ask the question.</a:t>
             </a:r>
             <a:endParaRPr lang="en-US" dirty="0"/>
           </a:p>
@@ -2139,7 +2140,7 @@
           <a:p>
             <a:r>
               <a:rPr lang="en-US" dirty="0"/>
-              <a:t>Here is the question for Activity 3: What is a plantation? Give two examples in Cameroon. Take one minute to think and write your answer in your rough notebook.</a:t>
+              <a:t>Here is the question for Activity 3: What do we call a very large farm that grows one crop for sale? Take one minute to think and write your answer in your rough notebook.</a:t>
             </a:r>
             <a:endParaRPr lang="en-US" dirty="0"/>
           </a:p>
@@ -2227,7 +2228,7 @@
           <a:p>
             <a:r>
               <a:rPr lang="en-US" dirty="0"/>
-              <a:t>Let us check the answer together. A very large farm that grows one cash crop for sale, like the oil palm and rubber of the CDC or SOCAPALM.</a:t>
+              <a:t>Let us check the answer together. A plantation.</a:t>
             </a:r>
             <a:endParaRPr lang="en-US" dirty="0"/>
           </a:p>
@@ -2315,7 +2316,7 @@
           <a:p>
             <a:r>
               <a:rPr lang="en-US" dirty="0"/>
-              <a:t>Activity 4. Look carefully at this picture: a small farmer dries cocoa beans. Observe every detail before I ask the question.</a:t>
+              <a:t>Activity 4. Look carefully at this picture: a sawmill. Observe every detail before I ask the question.</a:t>
             </a:r>
             <a:endParaRPr lang="en-US" dirty="0"/>
           </a:p>
@@ -2403,7 +2404,7 @@
           <a:p>
             <a:r>
               <a:rPr lang="en-US" dirty="0"/>
-              <a:t>Here is the question for Activity 4: Which cash crops do small farmers grow in the forest region? Take one minute to think and write your answer in your rough notebook.</a:t>
+              <a:t>Here is the question for Activity 4: What happens to the logs in a sawmill? Take one minute to think and write your answer in your rough notebook.</a:t>
             </a:r>
             <a:endParaRPr lang="en-US" dirty="0"/>
           </a:p>
@@ -2579,7 +2580,7 @@
           <a:p>
             <a:r>
               <a:rPr lang="en-US" dirty="0"/>
-              <a:t>Let us check the answer together. Cocoa and coffee (also oil palm and bananas).</a:t>
+              <a:t>Let us check the answer together. They are sawn into planks.</a:t>
             </a:r>
             <a:endParaRPr lang="en-US" dirty="0"/>
           </a:p>
@@ -2667,7 +2668,7 @@
           <a:p>
             <a:r>
               <a:rPr lang="en-US" dirty="0"/>
-              <a:t>Activity 5. Look carefully at this picture: workers in a sawmill. Observe every detail before I ask the question.</a:t>
+              <a:t>Activity 5. Look carefully at this picture: forest animals. Observe every detail before I ask the question.</a:t>
             </a:r>
             <a:endParaRPr lang="en-US" dirty="0"/>
           </a:p>
@@ -2755,7 +2756,7 @@
           <a:p>
             <a:r>
               <a:rPr lang="en-US" dirty="0"/>
-              <a:t>Here is the question for Activity 5: Give the stages of lumbering from the forest to the port. Take one minute to think and write your answer in your rough notebook.</a:t>
+              <a:t>Here is the question for Activity 5: Why is hunting controlled by law? Take one minute to think and write your answer in your rough notebook.</a:t>
             </a:r>
             <a:endParaRPr lang="en-US" dirty="0"/>
           </a:p>
@@ -2843,7 +2844,7 @@
           <a:p>
             <a:r>
               <a:rPr lang="en-US" dirty="0"/>
-              <a:t>Let us check the answer together. Felling the trees, dragging the logs, carrying them by lorry, sawing them in a sawmill and exporting them from Douala or Kribi.</a:t>
+              <a:t>Let us check the answer together. To protect animals that are becoming rare.</a:t>
             </a:r>
             <a:endParaRPr lang="en-US" dirty="0"/>
           </a:p>
@@ -3107,7 +3108,7 @@
           <a:p>
             <a:r>
               <a:rPr lang="en-US" dirty="0"/>
-              <a:t>Let us copy Farming. Farming in the Equatorial region takes the following forms. On this slide we have Shifting cultivation and Food crops. Write each point on a new line, with the key term first, and explain it in your own words when we revise. When you finish, we go to the next slide.</a:t>
+              <a:t>Let us copy Farming. Farming takes the following forms. Copy the point on Shifting cultivation on the left, then draw the diagram on the right: slash and burn. Give it a title and label it clearly.</a:t>
             </a:r>
             <a:endParaRPr lang="en-US" dirty="0"/>
           </a:p>
@@ -3195,7 +3196,7 @@
           <a:p>
             <a:r>
               <a:rPr lang="en-US" dirty="0"/>
-              <a:t>We continue with Farming. On this slide we have Cash crops and Plantations. Write each point on a new line, with the key term first, and explain it in your own words when we revise.</a:t>
+              <a:t>We continue with Farming. On this slide we have Food crops and Cash crops. Write each point on a new line, with the key term first, and explain it in your own words when we revise.</a:t>
             </a:r>
             <a:endParaRPr lang="en-US" dirty="0"/>
           </a:p>
@@ -3283,7 +3284,7 @@
           <a:p>
             <a:r>
               <a:rPr lang="en-US" dirty="0"/>
-              <a:t>Let us copy Forestry and Lumbering. Lumbering is carried out in the following stages. On this slide we have Felling and Transport. Write each point on a new line, with the key term first, and explain it in your own words when we revise. When you finish, we go to the next slide.</a:t>
+              <a:t>Copy the point on Plantations on the left, then draw the diagram on the right: an oil palm plantation. Give it a title and label it clearly.</a:t>
             </a:r>
             <a:endParaRPr lang="en-US" dirty="0"/>
           </a:p>
@@ -3371,7 +3372,7 @@
           <a:p>
             <a:r>
               <a:rPr lang="en-US" dirty="0"/>
-              <a:t>We continue with Forestry and Lumbering. On this slide we have Processing and export. Write each point on a new line, with the key term first, and explain it in your own words when we revise.</a:t>
+              <a:t>Let us copy Forestry and Lumbering. Lumbering has the following stages. On this slide we have Felling and Transport. Write each point on a new line, with the key term first, and explain it in your own words when we revise.</a:t>
             </a:r>
             <a:endParaRPr lang="en-US" dirty="0"/>
           </a:p>
@@ -3547,7 +3548,7 @@
           <a:p>
             <a:r>
               <a:rPr lang="en-US" dirty="0"/>
-              <a:t>Let us copy Hunting, Gathering and Other Activities. People also carry out the following activities. On this slide we have Hunting and Gathering. Write each point on a new line, with the key term first, and explain it in your own words when we revise. When you finish, we go to the next slide.</a:t>
+              <a:t>Copy the point on Sawing and export on the left, then draw the diagram on the right: a sawmill. Give it a title and label it clearly.</a:t>
             </a:r>
             <a:endParaRPr lang="en-US" dirty="0"/>
           </a:p>
@@ -3635,7 +3636,7 @@
           <a:p>
             <a:r>
               <a:rPr lang="en-US" dirty="0"/>
-              <a:t>We continue with Hunting, Gathering and Other Activities. On this slide we have Fishing and mining. Write each point on a new line, with the key term first, and explain it in your own words when we revise.</a:t>
+              <a:t>Let us copy Hunting and Other Activities. People also carry out the following activities. On this slide we have Hunting and Gathering. Write each point on a new line, with the key term first, and explain it in your own words when we revise. When you finish, we go to the next slide.</a:t>
             </a:r>
             <a:endParaRPr lang="en-US" dirty="0"/>
           </a:p>
@@ -3723,7 +3724,7 @@
           <a:p>
             <a:r>
               <a:rPr lang="en-US" dirty="0"/>
-              <a:t>Now let us check what you have understood. Question 1: What is shifting cultivation? Answer in your exercise book.</a:t>
+              <a:t>We continue with Hunting and Other Activities. On this slide we have Fishing and Mining. Write each point on a new line, with the key term first, and explain it in your own words when we revise.</a:t>
             </a:r>
             <a:endParaRPr lang="en-US" dirty="0"/>
           </a:p>
@@ -3811,7 +3812,7 @@
           <a:p>
             <a:r>
               <a:rPr lang="en-US" dirty="0"/>
-              <a:t>The expected answer is: clearing and burning a piece of forest, farming it for a few years and moving to a new place when the soil is poor. If you got it right, well done.</a:t>
+              <a:t>Now let us check what you have understood. Question 1: What is shifting cultivation? Answer in your exercise book.</a:t>
             </a:r>
             <a:endParaRPr lang="en-US" dirty="0"/>
           </a:p>
@@ -3899,7 +3900,7 @@
           <a:p>
             <a:r>
               <a:rPr lang="en-US" dirty="0"/>
-              <a:t>Now let us check what you have understood. Question 2: Name two activities other than farming in the Equatorial region. Answer in your exercise book.</a:t>
+              <a:t>The expected answer is: clearing and burning a piece of forest, farming it for a few years and moving to a new place when the soil is poor. If you got it right, well done.</a:t>
             </a:r>
             <a:endParaRPr lang="en-US" dirty="0"/>
           </a:p>
@@ -3987,7 +3988,7 @@
           <a:p>
             <a:r>
               <a:rPr lang="en-US" dirty="0"/>
-              <a:t>The expected answer is: lumbering and hunting (also gathering, fishing, mining). If you got it right, well done.</a:t>
+              <a:t>Now let us check what you have understood. Question 2: Name two activities other than farming in the Equatorial region. Answer in your exercise book.</a:t>
             </a:r>
             <a:endParaRPr lang="en-US" dirty="0"/>
           </a:p>
@@ -4075,7 +4076,7 @@
           <a:p>
             <a:r>
               <a:rPr lang="en-US" dirty="0"/>
-              <a:t>Take your time to copy this part; we will continue together.</a:t>
+              <a:t>The expected answer is: lumbering and hunting (also gathering, fishing, mining). If you got it right, well done.</a:t>
             </a:r>
             <a:endParaRPr lang="en-US" dirty="0"/>
           </a:p>
@@ -4163,7 +4164,7 @@
           <a:p>
             <a:r>
               <a:rPr lang="en-US" dirty="0"/>
-              <a:t>For those who need more practice, fill in the blanks in your exercise book. The answers are: number 1, burn; number 2, plantation; number 3, lumbering.</a:t>
+              <a:t>Take your time to copy this part; we will continue together.</a:t>
             </a:r>
             <a:endParaRPr lang="en-US" dirty="0"/>
           </a:p>
@@ -4251,7 +4252,7 @@
           <a:p>
             <a:r>
               <a:rPr lang="en-US" dirty="0"/>
-              <a:t>For your homework: Write two problems that forestry, farming or hunting cause to the forest, its animals or its rivers. We shall correct it at the beginning of our next lesson.</a:t>
+              <a:t>For those who need more practice, fill in the blanks in your exercise book. The answers are: number 1, burn; number 2, plantation; number 3, lumbering.</a:t>
             </a:r>
             <a:endParaRPr lang="en-US" dirty="0"/>
           </a:p>
@@ -4339,7 +4340,7 @@
           <a:p>
             <a:r>
               <a:rPr lang="en-US" dirty="0"/>
-              <a:t>Our next lesson will be on Lesson 1 (Part 5): The Equatorial Region: Problems Faced, Problems Caused and Attempted Solutions. Thank you for your attention, and see you next time.</a:t>
+              <a:t>For your homework: Write two problems that forestry, farming or hunting cause to the forest, its animals or its rivers. We shall correct it at the beginning of our next lesson.</a:t>
             </a:r>
             <a:endParaRPr lang="en-US" dirty="0"/>
           </a:p>
@@ -4515,7 +4516,7 @@
           <a:p>
             <a:r>
               <a:rPr lang="en-US" dirty="0"/>
-              <a:t>Let us play the bilingual game. I say a word in English, and you give me the French word. Then we do the reverse.</a:t>
+              <a:t>Our next lesson will be on Lesson 1 (Part 5): The Equatorial Region: Problems Faced, Problems Caused and Attempted Solutions. Thank you for your attention, and see you next time.</a:t>
             </a:r>
             <a:endParaRPr lang="en-US" dirty="0"/>
           </a:p>
@@ -4603,7 +4604,7 @@
           <a:p>
             <a:r>
               <a:rPr lang="en-US" dirty="0"/>
-              <a:t>I record this information in the official logbook of the class after the lesson.</a:t>
+              <a:t>Let us play the bilingual game. I say a word in English, and you give me the French word. Then we do the reverse.</a:t>
             </a:r>
             <a:endParaRPr lang="en-US" dirty="0"/>
           </a:p>
@@ -4691,7 +4692,7 @@
           <a:p>
             <a:r>
               <a:rPr lang="en-US" dirty="0"/>
-              <a:t>I complete the second page of the logbook: the matter taught, the evaluation, the homework and the attendance.</a:t>
+              <a:t>I record this information in the official logbook of the class after the lesson.</a:t>
             </a:r>
             <a:endParaRPr lang="en-US" dirty="0"/>
           </a:p>
@@ -4779,7 +4780,7 @@
           <a:p>
             <a:r>
               <a:rPr lang="en-US" dirty="0"/>
-              <a:t>This slide is for me, the teacher: it gives the timing of the lesson and what to do if the projector is not available.</a:t>
+              <a:t>I complete the second page of the logbook: the matter taught, the evaluation, the homework and the attendance.</a:t>
             </a:r>
             <a:endParaRPr lang="en-US" dirty="0"/>
           </a:p>
@@ -4867,7 +4868,7 @@
           <a:p>
             <a:r>
               <a:rPr lang="en-US" dirty="0"/>
-              <a:t>These are the references and picture credits used to prepare this lesson.</a:t>
+              <a:t>This slide is for me, the teacher: it gives the timing of the lesson and what to do if the projector is not available.</a:t>
             </a:r>
             <a:endParaRPr lang="en-US" dirty="0"/>
           </a:p>
@@ -4891,6 +4892,94 @@
             <a:fld id="{F7021451-1387-4CA6-816F-3879F97B5CBC}" type="slidenum">
               <a:rPr lang="en-US"/>
               <a:t>54</a:t>
+            </a:fld>
+            <a:endParaRPr lang="en-US"/>
+          </a:p>
+        </p:txBody>
+      </p:sp>
+    </p:spTree>
+    <p:extLst>
+      <p:ext uri="{BB962C8B-B14F-4D97-AF65-F5344CB8AC3E}">
+        <p14:creationId xmlns:p14="http://schemas.microsoft.com/office/powerpoint/2010/main" val="1024086991"/>
+      </p:ext>
+    </p:extLst>
+  </p:cSld>
+  <p:clrMapOvr>
+    <a:masterClrMapping/>
+  </p:clrMapOvr>
+</p:notes>
+</file>
+
+<file path=ppt/notesSlides/notesSlide55.xml><?xml version="1.0" encoding="utf-8"?>
+<p:notes xmlns:a="http://schemas.openxmlformats.org/drawingml/2006/main" xmlns:r="http://schemas.openxmlformats.org/officeDocument/2006/relationships" xmlns:p="http://schemas.openxmlformats.org/presentationml/2006/main">
+  <p:cSld>
+    <p:spTree>
+      <p:nvGrpSpPr>
+        <p:cNvPr id="1" name=""/>
+        <p:cNvGrpSpPr/>
+        <p:nvPr/>
+      </p:nvGrpSpPr>
+      <p:grpSpPr>
+        <a:xfrm>
+          <a:off x="0" y="0"/>
+          <a:ext cx="0" cy="0"/>
+          <a:chOff x="0" y="0"/>
+          <a:chExt cx="0" cy="0"/>
+        </a:xfrm>
+      </p:grpSpPr>
+      <p:sp>
+        <p:nvSpPr>
+          <p:cNvPr id="2" name="Slide Image Placeholder 1"/>
+          <p:cNvSpPr>
+            <a:spLocks noGrp="1" noRot="1" noChangeAspect="1"/>
+          </p:cNvSpPr>
+          <p:nvPr>
+            <p:ph type="sldImg"/>
+          </p:nvPr>
+        </p:nvSpPr>
+        <p:spPr/>
+      </p:sp>
+      <p:sp>
+        <p:nvSpPr>
+          <p:cNvPr id="3" name="Notes Placeholder 2"/>
+          <p:cNvSpPr>
+            <a:spLocks noGrp="1"/>
+          </p:cNvSpPr>
+          <p:nvPr>
+            <p:ph type="body" idx="1"/>
+          </p:nvPr>
+        </p:nvSpPr>
+        <p:spPr/>
+        <p:txBody>
+          <a:bodyPr/>
+          <a:lstStyle/>
+          <a:p>
+            <a:r>
+              <a:rPr lang="en-US" dirty="0"/>
+              <a:t>These are the references and picture credits used to prepare this lesson.</a:t>
+            </a:r>
+            <a:endParaRPr lang="en-US" dirty="0"/>
+          </a:p>
+        </p:txBody>
+      </p:sp>
+      <p:sp>
+        <p:nvSpPr>
+          <p:cNvPr id="4" name="Slide Number Placeholder 3"/>
+          <p:cNvSpPr>
+            <a:spLocks noGrp="1"/>
+          </p:cNvSpPr>
+          <p:nvPr>
+            <p:ph type="sldNum" sz="quarter" idx="10"/>
+          </p:nvPr>
+        </p:nvSpPr>
+        <p:spPr/>
+        <p:txBody>
+          <a:bodyPr/>
+          <a:lstStyle/>
+          <a:p>
+            <a:fld id="{F7021451-1387-4CA6-816F-3879F97B5CBC}" type="slidenum">
+              <a:rPr lang="en-US"/>
+              <a:t>55</a:t>
             </a:fld>
             <a:endParaRPr lang="en-US"/>
           </a:p>
@@ -6599,7 +6688,7 @@
         <p:spPr>
           <a:xfrm>
             <a:off x="0" y="658368"/>
-            <a:ext cx="3840480" cy="5833872"/>
+            <a:ext cx="1463040" cy="5833872"/>
           </a:xfrm>
           <a:prstGeom prst="rect">
             <a:avLst/>
@@ -6614,8 +6703,8 @@
         </p:nvSpPr>
         <p:spPr>
           <a:xfrm>
-            <a:off x="4069080" y="1005840"/>
-            <a:ext cx="7802575" cy="731520"/>
+            <a:off x="1691640" y="1005840"/>
+            <a:ext cx="10180015" cy="731520"/>
           </a:xfrm>
           <a:prstGeom prst="rect">
             <a:avLst/>
@@ -6655,8 +6744,8 @@
         </p:nvSpPr>
         <p:spPr>
           <a:xfrm>
-            <a:off x="4069080" y="1783080"/>
-            <a:ext cx="7802575" cy="4663440"/>
+            <a:off x="1691640" y="1783080"/>
+            <a:ext cx="10180015" cy="4663440"/>
           </a:xfrm>
           <a:prstGeom prst="rect">
             <a:avLst/>
@@ -6683,7 +6772,7 @@
                 <a:ea typeface="Times New Roman" pitchFamily="34" charset="-122"/>
                 <a:cs typeface="Times New Roman" pitchFamily="34" charset="-120"/>
               </a:rPr>
-              <a:t>Paul's grandfather lives near Sangmélima. Every few years he clears a new piece of forest, burns it and plants cassava and plantains. Near the town, a big company grows oil palm on a very large farm.</a:t>
+              <a:t>Paul's grandfather lives near Sangmélima. Every few years he clears a new piece of forest, burns it and plants cassava. Near the town, a company grows oil palm on a very large farm. Paul asks: "Why does grandfather keep moving his farm, and what other work do people do in the forest?"</a:t>
             </a:r>
             <a:endParaRPr lang="en-US" sz="4000" dirty="0"/>
           </a:p>
@@ -7121,7 +7210,7 @@
                 <a:ea typeface="Times New Roman" pitchFamily="34" charset="-122"/>
                 <a:cs typeface="Times New Roman" pitchFamily="34" charset="-120"/>
               </a:rPr>
-              <a:t>We want to know the different ways people farm in the forest region.</a:t>
+              <a:t>Paul does not understand why his grandfather moves his farm and what other activities exist in the forest.</a:t>
             </a:r>
             <a:endParaRPr lang="en-US" sz="4000" dirty="0"/>
           </a:p>
@@ -7340,7 +7429,7 @@
                 <a:ea typeface="Times New Roman" pitchFamily="34" charset="-122"/>
                 <a:cs typeface="Times New Roman" pitchFamily="34" charset="-120"/>
               </a:rPr>
-              <a:t>What does the grandfather do every few years?</a:t>
+              <a:t>What does the grandfather plant?</a:t>
             </a:r>
             <a:endParaRPr lang="en-US" sz="4000" dirty="0"/>
           </a:p>
@@ -7559,7 +7648,7 @@
                 <a:ea typeface="Times New Roman" pitchFamily="34" charset="-122"/>
                 <a:cs typeface="Times New Roman" pitchFamily="34" charset="-120"/>
               </a:rPr>
-              <a:t>He clears and burns a new piece of forest to farm.</a:t>
+              <a:t>Cassava.</a:t>
             </a:r>
             <a:endParaRPr lang="en-US" sz="4000" dirty="0"/>
           </a:p>
@@ -7778,7 +7867,7 @@
                 <a:ea typeface="Times New Roman" pitchFamily="34" charset="-122"/>
                 <a:cs typeface="Times New Roman" pitchFamily="34" charset="-120"/>
               </a:rPr>
-              <a:t>How is the company farm different?</a:t>
+              <a:t>What does the company grow?</a:t>
             </a:r>
             <a:endParaRPr lang="en-US" sz="4000" dirty="0"/>
           </a:p>
@@ -7997,7 +8086,7 @@
                 <a:ea typeface="Times New Roman" pitchFamily="34" charset="-122"/>
                 <a:cs typeface="Times New Roman" pitchFamily="34" charset="-120"/>
               </a:rPr>
-              <a:t>It is very large, it grows one crop and it sells the harvest.</a:t>
+              <a:t>Oil palm, on a very large farm (plantation).</a:t>
             </a:r>
             <a:endParaRPr lang="en-US" sz="4000" dirty="0"/>
           </a:p>
@@ -8547,7 +8636,7 @@
                 <a:ea typeface="Calibri" pitchFamily="34" charset="-122"/>
                 <a:cs typeface="Calibri" pitchFamily="34" charset="-120"/>
               </a:rPr>
-              <a:t>1. SHIFTING CULTIVATION</a:t>
+              <a:t>1. FARMING</a:t>
             </a:r>
             <a:endParaRPr lang="en-US" sz="1400" dirty="0"/>
           </a:p>
@@ -8649,7 +8738,7 @@
                 <a:ea typeface="Times New Roman" pitchFamily="34" charset="-122"/>
                 <a:cs typeface="Times New Roman" pitchFamily="34" charset="-120"/>
               </a:rPr>
-              <a:t>A piece of forest cleared and burnt for farming.</a:t>
+              <a:t>A cleared piece of forest.</a:t>
             </a:r>
             <a:endParaRPr lang="en-US" sz="1800" dirty="0"/>
           </a:p>
@@ -9356,7 +9445,7 @@
                 <a:ea typeface="Calibri" pitchFamily="34" charset="-122"/>
                 <a:cs typeface="Calibri" pitchFamily="34" charset="-120"/>
               </a:rPr>
-              <a:t>1. SHIFTING CULTIVATION</a:t>
+              <a:t>1. FARMING</a:t>
             </a:r>
             <a:endParaRPr lang="en-US" sz="1400" dirty="0"/>
           </a:p>
@@ -9463,7 +9552,7 @@
                 <a:ea typeface="Times New Roman" pitchFamily="34" charset="-122"/>
                 <a:cs typeface="Times New Roman" pitchFamily="34" charset="-120"/>
               </a:rPr>
-              <a:t>What is this farmer preparing? Why does he move to a new place after a few years?</a:t>
+              <a:t>Why does the farmer move to a new place after a few years?</a:t>
             </a:r>
             <a:endParaRPr lang="en-US" sz="4000" dirty="0"/>
           </a:p>
@@ -9575,7 +9664,7 @@
                 <a:ea typeface="Calibri" pitchFamily="34" charset="-122"/>
                 <a:cs typeface="Calibri" pitchFamily="34" charset="-120"/>
               </a:rPr>
-              <a:t>1. SHIFTING CULTIVATION</a:t>
+              <a:t>1. FARMING</a:t>
             </a:r>
             <a:endParaRPr lang="en-US" sz="1400" dirty="0"/>
           </a:p>
@@ -9682,7 +9771,7 @@
                 <a:ea typeface="Times New Roman" pitchFamily="34" charset="-122"/>
                 <a:cs typeface="Times New Roman" pitchFamily="34" charset="-120"/>
               </a:rPr>
-              <a:t>He is preparing a farm by slash and burn. After a few years the soil becomes poor, so he moves: this is shifting cultivation.</a:t>
+              <a:t>The soil becomes poor: this is shifting cultivation.</a:t>
             </a:r>
             <a:endParaRPr lang="en-US" sz="4000" dirty="0"/>
           </a:p>
@@ -9794,7 +9883,7 @@
                 <a:ea typeface="Calibri" pitchFamily="34" charset="-122"/>
                 <a:cs typeface="Calibri" pitchFamily="34" charset="-120"/>
               </a:rPr>
-              <a:t>1. FOOD CROPS</a:t>
+              <a:t>1. FARMING</a:t>
             </a:r>
             <a:endParaRPr lang="en-US" sz="1400" dirty="0"/>
           </a:p>
@@ -9896,7 +9985,7 @@
                 <a:ea typeface="Times New Roman" pitchFamily="34" charset="-122"/>
                 <a:cs typeface="Times New Roman" pitchFamily="34" charset="-120"/>
               </a:rPr>
-              <a:t>A farm with cassava and bananas.</a:t>
+              <a:t>A food crop farm.</a:t>
             </a:r>
             <a:endParaRPr lang="en-US" sz="1800" dirty="0"/>
           </a:p>
@@ -10008,7 +10097,7 @@
                 <a:ea typeface="Calibri" pitchFamily="34" charset="-122"/>
                 <a:cs typeface="Calibri" pitchFamily="34" charset="-120"/>
               </a:rPr>
-              <a:t>1. FOOD CROPS</a:t>
+              <a:t>1. FARMING</a:t>
             </a:r>
             <a:endParaRPr lang="en-US" sz="1400" dirty="0"/>
           </a:p>
@@ -10115,7 +10204,7 @@
                 <a:ea typeface="Times New Roman" pitchFamily="34" charset="-122"/>
                 <a:cs typeface="Times New Roman" pitchFamily="34" charset="-120"/>
               </a:rPr>
-              <a:t>Name three food crops grown in the forest region.</a:t>
+              <a:t>Name two food crops of the forest region.</a:t>
             </a:r>
             <a:endParaRPr lang="en-US" sz="4000" dirty="0"/>
           </a:p>
@@ -10227,7 +10316,7 @@
                 <a:ea typeface="Calibri" pitchFamily="34" charset="-122"/>
                 <a:cs typeface="Calibri" pitchFamily="34" charset="-120"/>
               </a:rPr>
-              <a:t>1. FOOD CROPS</a:t>
+              <a:t>1. FARMING</a:t>
             </a:r>
             <a:endParaRPr lang="en-US" sz="1400" dirty="0"/>
           </a:p>
@@ -10334,7 +10423,7 @@
                 <a:ea typeface="Times New Roman" pitchFamily="34" charset="-122"/>
                 <a:cs typeface="Times New Roman" pitchFamily="34" charset="-120"/>
               </a:rPr>
-              <a:t>Cassava, plantains and cocoyams (also maize and groundnuts).</a:t>
+              <a:t>Cassava and plantains (also cocoyams).</a:t>
             </a:r>
             <a:endParaRPr lang="en-US" sz="4000" dirty="0"/>
           </a:p>
@@ -10446,7 +10535,7 @@
                 <a:ea typeface="Calibri" pitchFamily="34" charset="-122"/>
                 <a:cs typeface="Calibri" pitchFamily="34" charset="-120"/>
               </a:rPr>
-              <a:t>1. PLANTATIONS</a:t>
+              <a:t>1. FARMING</a:t>
             </a:r>
             <a:endParaRPr lang="en-US" sz="1400" dirty="0"/>
           </a:p>
@@ -10548,7 +10637,7 @@
                 <a:ea typeface="Times New Roman" pitchFamily="34" charset="-122"/>
                 <a:cs typeface="Times New Roman" pitchFamily="34" charset="-120"/>
               </a:rPr>
-              <a:t>An oil palm plantation seen from the air.</a:t>
+              <a:t>Oil palms on a large farm.</a:t>
             </a:r>
             <a:endParaRPr lang="en-US" sz="1800" dirty="0"/>
           </a:p>
@@ -10660,7 +10749,7 @@
                 <a:ea typeface="Calibri" pitchFamily="34" charset="-122"/>
                 <a:cs typeface="Calibri" pitchFamily="34" charset="-120"/>
               </a:rPr>
-              <a:t>1. PLANTATIONS</a:t>
+              <a:t>1. FARMING</a:t>
             </a:r>
             <a:endParaRPr lang="en-US" sz="1400" dirty="0"/>
           </a:p>
@@ -10767,7 +10856,7 @@
                 <a:ea typeface="Times New Roman" pitchFamily="34" charset="-122"/>
                 <a:cs typeface="Times New Roman" pitchFamily="34" charset="-120"/>
               </a:rPr>
-              <a:t>What is a plantation? Give two examples in Cameroon.</a:t>
+              <a:t>What do we call a very large farm that grows one crop for sale?</a:t>
             </a:r>
             <a:endParaRPr lang="en-US" sz="4000" dirty="0"/>
           </a:p>
@@ -10879,7 +10968,7 @@
                 <a:ea typeface="Calibri" pitchFamily="34" charset="-122"/>
                 <a:cs typeface="Calibri" pitchFamily="34" charset="-120"/>
               </a:rPr>
-              <a:t>1. PLANTATIONS</a:t>
+              <a:t>1. FARMING</a:t>
             </a:r>
             <a:endParaRPr lang="en-US" sz="1400" dirty="0"/>
           </a:p>
@@ -10986,7 +11075,7 @@
                 <a:ea typeface="Times New Roman" pitchFamily="34" charset="-122"/>
                 <a:cs typeface="Times New Roman" pitchFamily="34" charset="-120"/>
               </a:rPr>
-              <a:t>A very large farm that grows one cash crop for sale, like the oil palm and rubber of the CDC or SOCAPALM.</a:t>
+              <a:t>A plantation.</a:t>
             </a:r>
             <a:endParaRPr lang="en-US" sz="4000" dirty="0"/>
           </a:p>
@@ -11098,7 +11187,7 @@
                 <a:ea typeface="Calibri" pitchFamily="34" charset="-122"/>
                 <a:cs typeface="Calibri" pitchFamily="34" charset="-120"/>
               </a:rPr>
-              <a:t>1. CASH CROPS</a:t>
+              <a:t>2. LUMBERING</a:t>
             </a:r>
             <a:endParaRPr lang="en-US" sz="1400" dirty="0"/>
           </a:p>
@@ -11145,7 +11234,7 @@
       </p:sp>
       <p:pic>
         <p:nvPicPr>
-          <p:cNvPr id="4" name="Image 0" descr="/home/claude/f4/img/v2/usa_cocoa.jpg">    </p:cNvPr>
+          <p:cNvPr id="4" name="Image 0" descr="/home/claude/f4/img/v2/usa_sawmill.jpg">    </p:cNvPr>
           <p:cNvPicPr>
             <a:picLocks noChangeAspect="1"/>
           </p:cNvPicPr>
@@ -11200,7 +11289,7 @@
                 <a:ea typeface="Times New Roman" pitchFamily="34" charset="-122"/>
                 <a:cs typeface="Times New Roman" pitchFamily="34" charset="-120"/>
               </a:rPr>
-              <a:t>A small farmer dries cocoa beans.</a:t>
+              <a:t>A sawmill.</a:t>
             </a:r>
             <a:endParaRPr lang="en-US" sz="1800" dirty="0"/>
           </a:p>
@@ -11312,7 +11401,7 @@
                 <a:ea typeface="Calibri" pitchFamily="34" charset="-122"/>
                 <a:cs typeface="Calibri" pitchFamily="34" charset="-120"/>
               </a:rPr>
-              <a:t>1. CASH CROPS</a:t>
+              <a:t>2. LUMBERING</a:t>
             </a:r>
             <a:endParaRPr lang="en-US" sz="1400" dirty="0"/>
           </a:p>
@@ -11419,7 +11508,7 @@
                 <a:ea typeface="Times New Roman" pitchFamily="34" charset="-122"/>
                 <a:cs typeface="Times New Roman" pitchFamily="34" charset="-120"/>
               </a:rPr>
-              <a:t>Which cash crops do small farmers grow in the forest region?</a:t>
+              <a:t>What happens to the logs in a sawmill?</a:t>
             </a:r>
             <a:endParaRPr lang="en-US" sz="4000" dirty="0"/>
           </a:p>
@@ -12540,7 +12629,7 @@
                 <a:ea typeface="Calibri" pitchFamily="34" charset="-122"/>
                 <a:cs typeface="Calibri" pitchFamily="34" charset="-120"/>
               </a:rPr>
-              <a:t>1. CASH CROPS</a:t>
+              <a:t>2. LUMBERING</a:t>
             </a:r>
             <a:endParaRPr lang="en-US" sz="1400" dirty="0"/>
           </a:p>
@@ -12647,7 +12736,7 @@
                 <a:ea typeface="Times New Roman" pitchFamily="34" charset="-122"/>
                 <a:cs typeface="Times New Roman" pitchFamily="34" charset="-120"/>
               </a:rPr>
-              <a:t>Cocoa and coffee (also oil palm and bananas).</a:t>
+              <a:t>They are sawn into planks.</a:t>
             </a:r>
             <a:endParaRPr lang="en-US" sz="4000" dirty="0"/>
           </a:p>
@@ -12759,7 +12848,7 @@
                 <a:ea typeface="Calibri" pitchFamily="34" charset="-122"/>
                 <a:cs typeface="Calibri" pitchFamily="34" charset="-120"/>
               </a:rPr>
-              <a:t>2. LUMBERING</a:t>
+              <a:t>3. HUNTING AND GATHERING</a:t>
             </a:r>
             <a:endParaRPr lang="en-US" sz="1400" dirty="0"/>
           </a:p>
@@ -12806,7 +12895,7 @@
       </p:sp>
       <p:pic>
         <p:nvPicPr>
-          <p:cNvPr id="4" name="Image 0" descr="/home/claude/f4/img/v2/usa_sawmill.jpg">    </p:cNvPr>
+          <p:cNvPr id="4" name="Image 0" descr="/home/claude/f4/img/v2/f2t_elephants.jpg">    </p:cNvPr>
           <p:cNvPicPr>
             <a:picLocks noChangeAspect="1"/>
           </p:cNvPicPr>
@@ -12820,8 +12909,8 @@
         </p:blipFill>
         <p:spPr>
           <a:xfrm>
-            <a:off x="2246610" y="1783080"/>
-            <a:ext cx="7698475" cy="4270248"/>
+            <a:off x="2250369" y="1783080"/>
+            <a:ext cx="7690957" cy="4270248"/>
           </a:xfrm>
           <a:prstGeom prst="rect">
             <a:avLst/>
@@ -12861,7 +12950,7 @@
                 <a:ea typeface="Times New Roman" pitchFamily="34" charset="-122"/>
                 <a:cs typeface="Times New Roman" pitchFamily="34" charset="-120"/>
               </a:rPr>
-              <a:t>Workers in a sawmill.</a:t>
+              <a:t>Forest animals.</a:t>
             </a:r>
             <a:endParaRPr lang="en-US" sz="1800" dirty="0"/>
           </a:p>
@@ -12973,7 +13062,7 @@
                 <a:ea typeface="Calibri" pitchFamily="34" charset="-122"/>
                 <a:cs typeface="Calibri" pitchFamily="34" charset="-120"/>
               </a:rPr>
-              <a:t>2. LUMBERING</a:t>
+              <a:t>3. HUNTING AND GATHERING</a:t>
             </a:r>
             <a:endParaRPr lang="en-US" sz="1400" dirty="0"/>
           </a:p>
@@ -13080,7 +13169,7 @@
                 <a:ea typeface="Times New Roman" pitchFamily="34" charset="-122"/>
                 <a:cs typeface="Times New Roman" pitchFamily="34" charset="-120"/>
               </a:rPr>
-              <a:t>Give the stages of lumbering from the forest to the port.</a:t>
+              <a:t>Why is hunting controlled by law?</a:t>
             </a:r>
             <a:endParaRPr lang="en-US" sz="4000" dirty="0"/>
           </a:p>
@@ -13192,7 +13281,7 @@
                 <a:ea typeface="Calibri" pitchFamily="34" charset="-122"/>
                 <a:cs typeface="Calibri" pitchFamily="34" charset="-120"/>
               </a:rPr>
-              <a:t>2. LUMBERING</a:t>
+              <a:t>3. HUNTING AND GATHERING</a:t>
             </a:r>
             <a:endParaRPr lang="en-US" sz="1400" dirty="0"/>
           </a:p>
@@ -13299,7 +13388,7 @@
                 <a:ea typeface="Times New Roman" pitchFamily="34" charset="-122"/>
                 <a:cs typeface="Times New Roman" pitchFamily="34" charset="-120"/>
               </a:rPr>
-              <a:t>Felling the trees, dragging the logs, carrying them by lorry, sawing them in a sawmill and exporting them from Douala or Kribi.</a:t>
+              <a:t>To protect animals that are becoming rare.</a:t>
             </a:r>
             <a:endParaRPr lang="en-US" sz="4000" dirty="0"/>
           </a:p>
@@ -13434,7 +13523,7 @@
         <p:spPr>
           <a:xfrm>
             <a:off x="0" y="658368"/>
-            <a:ext cx="3840480" cy="5833872"/>
+            <a:ext cx="5120640" cy="5833872"/>
           </a:xfrm>
           <a:prstGeom prst="rect">
             <a:avLst/>
@@ -13449,8 +13538,8 @@
         </p:nvSpPr>
         <p:spPr>
           <a:xfrm>
-            <a:off x="4069080" y="1005840"/>
-            <a:ext cx="7802575" cy="731520"/>
+            <a:off x="5349240" y="1005840"/>
+            <a:ext cx="6522415" cy="731520"/>
           </a:xfrm>
           <a:prstGeom prst="rect">
             <a:avLst/>
@@ -13490,8 +13579,8 @@
         </p:nvSpPr>
         <p:spPr>
           <a:xfrm>
-            <a:off x="4069080" y="1783080"/>
-            <a:ext cx="7802575" cy="4663440"/>
+            <a:off x="5349240" y="1783080"/>
+            <a:ext cx="6522415" cy="4663440"/>
           </a:xfrm>
           <a:prstGeom prst="rect">
             <a:avLst/>
@@ -13510,7 +13599,7 @@
               <a:buNone/>
             </a:pPr>
             <a:r>
-              <a:rPr lang="en-US" sz="4000" b="1" dirty="0">
+              <a:rPr lang="en-US" sz="3200" b="1" dirty="0">
                 <a:solidFill>
                   <a:srgbClr val="111111"/>
                 </a:solidFill>
@@ -13520,7 +13609,7 @@
               </a:rPr>
               <a:t>Topic: Man in His Environment</a:t>
             </a:r>
-            <a:endParaRPr lang="en-US" sz="4000" dirty="0"/>
+            <a:endParaRPr lang="en-US" sz="3200" dirty="0"/>
           </a:p>
           <a:p>
             <a:pPr algn="l" indent="0" marL="0">
@@ -13530,7 +13619,7 @@
               <a:buNone/>
             </a:pPr>
             <a:r>
-              <a:rPr lang="en-US" sz="4000" b="1" dirty="0">
+              <a:rPr lang="en-US" sz="3200" b="1" dirty="0">
                 <a:solidFill>
                   <a:srgbClr val="111111"/>
                 </a:solidFill>
@@ -13540,7 +13629,7 @@
               </a:rPr>
               <a:t>Sub-topic: Natural Regions</a:t>
             </a:r>
-            <a:endParaRPr lang="en-US" sz="4000" dirty="0"/>
+            <a:endParaRPr lang="en-US" sz="3200" dirty="0"/>
           </a:p>
           <a:p>
             <a:pPr algn="l" indent="0" marL="0">
@@ -13550,7 +13639,7 @@
               <a:buNone/>
             </a:pPr>
             <a:r>
-              <a:rPr lang="en-US" sz="4000" b="1" dirty="0">
+              <a:rPr lang="en-US" sz="3200" b="1" dirty="0">
                 <a:solidFill>
                   <a:srgbClr val="990011"/>
                 </a:solidFill>
@@ -13560,7 +13649,7 @@
               </a:rPr>
               <a:t>Lesson 1 (Part 4): The Equatorial Region: Human Activities (Farming, Lumbering, Hunting and Others)</a:t>
             </a:r>
-            <a:endParaRPr lang="en-US" sz="4000" dirty="0"/>
+            <a:endParaRPr lang="en-US" sz="3200" dirty="0"/>
           </a:p>
         </p:txBody>
       </p:sp>
@@ -13693,7 +13782,7 @@
         <p:spPr>
           <a:xfrm>
             <a:off x="0" y="658368"/>
-            <a:ext cx="1463040" cy="5833872"/>
+            <a:ext cx="2468880" cy="5833872"/>
           </a:xfrm>
           <a:prstGeom prst="rect">
             <a:avLst/>
@@ -13708,8 +13797,8 @@
         </p:nvSpPr>
         <p:spPr>
           <a:xfrm>
-            <a:off x="1691640" y="1005840"/>
-            <a:ext cx="10180015" cy="731520"/>
+            <a:off x="2697480" y="1005840"/>
+            <a:ext cx="9174175" cy="731520"/>
           </a:xfrm>
           <a:prstGeom prst="rect">
             <a:avLst/>
@@ -13749,8 +13838,8 @@
         </p:nvSpPr>
         <p:spPr>
           <a:xfrm>
-            <a:off x="1691640" y="1783080"/>
-            <a:ext cx="10180015" cy="4663440"/>
+            <a:off x="2697480" y="1783080"/>
+            <a:ext cx="9174175" cy="4663440"/>
           </a:xfrm>
           <a:prstGeom prst="rect">
             <a:avLst/>
@@ -13782,11 +13871,12 @@
             <a:endParaRPr lang="en-US" sz="4000" dirty="0"/>
           </a:p>
           <a:p>
-            <a:pPr algn="l" indent="0" marL="0">
+            <a:pPr algn="l" marL="342900" indent="-342900">
               <a:spcAft>
                 <a:spcPts val="800"/>
               </a:spcAft>
-              <a:buNone/>
+              <a:buSzPct val="100000"/>
+              <a:buChar char="•"/>
             </a:pPr>
             <a:r>
               <a:rPr lang="en-US" sz="4000" b="1" dirty="0">
@@ -13799,11 +13889,12 @@
               </a:rPr>
               <a:t>Shifting cultivation: </a:t>
             </a:r>
-            <a:pPr algn="l" indent="0" marL="0">
+            <a:pPr algn="l" marL="342900" indent="-342900">
               <a:spcAft>
                 <a:spcPts val="800"/>
               </a:spcAft>
-              <a:buNone/>
+              <a:buSzPct val="100000"/>
+              <a:buChar char="•"/>
             </a:pPr>
             <a:r>
               <a:rPr lang="en-US" sz="4000" dirty="0">
@@ -13814,16 +13905,17 @@
                 <a:ea typeface="Times New Roman" pitchFamily="34" charset="-122"/>
                 <a:cs typeface="Times New Roman" pitchFamily="34" charset="-120"/>
               </a:rPr>
-              <a:t>It is farming a cleared piece of forest for a few years and moving to a new place when the soil is poor.</a:t>
+              <a:t>It is farming a piece of forest for a few years and moving when the soil is poor.</a:t>
             </a:r>
             <a:endParaRPr lang="en-US" sz="4000" dirty="0"/>
           </a:p>
           <a:p>
-            <a:pPr algn="l" indent="0" marL="0">
+            <a:pPr algn="l" marL="342900" indent="-342900">
               <a:spcAft>
                 <a:spcPts val="800"/>
               </a:spcAft>
-              <a:buNone/>
+              <a:buSzPct val="100000"/>
+              <a:buChar char="•"/>
             </a:pPr>
             <a:r>
               <a:rPr lang="en-US" sz="4000" b="1" dirty="0">
@@ -13836,11 +13928,12 @@
               </a:rPr>
               <a:t>Lumbering: </a:t>
             </a:r>
-            <a:pPr algn="l" indent="0" marL="0">
+            <a:pPr algn="l" marL="342900" indent="-342900">
               <a:spcAft>
                 <a:spcPts val="800"/>
               </a:spcAft>
-              <a:buNone/>
+              <a:buSzPct val="100000"/>
+              <a:buChar char="•"/>
             </a:pPr>
             <a:r>
               <a:rPr lang="en-US" sz="4000" dirty="0">
@@ -13851,7 +13944,7 @@
                 <a:ea typeface="Times New Roman" pitchFamily="34" charset="-122"/>
                 <a:cs typeface="Times New Roman" pitchFamily="34" charset="-120"/>
               </a:rPr>
-              <a:t>It is the cutting of trees and the sale of their wood.</a:t>
+              <a:t>It is the cutting of trees for their wood.</a:t>
             </a:r>
             <a:endParaRPr lang="en-US" sz="4000" dirty="0"/>
           </a:p>
@@ -13969,9 +14062,131 @@
           </a:p>
         </p:txBody>
       </p:sp>
+      <p:sp>
+        <p:nvSpPr>
+          <p:cNvPr id="3" name="Text 1"/>
+          <p:cNvSpPr/>
+          <p:nvPr/>
+        </p:nvSpPr>
+        <p:spPr>
+          <a:xfrm>
+            <a:off x="365760" y="1005840"/>
+            <a:ext cx="11460175" cy="731520"/>
+          </a:xfrm>
+          <a:prstGeom prst="rect">
+            <a:avLst/>
+          </a:prstGeom>
+          <a:noFill/>
+          <a:ln/>
+        </p:spPr>
+        <p:txBody>
+          <a:bodyPr wrap="square" lIns="0" tIns="0" rIns="0" bIns="0" rtlCol="0" anchor="ctr">
+            <a:normAutofit/>
+          </a:bodyPr>
+          <a:lstStyle/>
+          <a:p>
+            <a:pPr algn="ctr" indent="0" marL="0">
+              <a:buNone/>
+            </a:pPr>
+            <a:r>
+              <a:rPr lang="en-US" sz="3600" b="1" dirty="0">
+                <a:solidFill>
+                  <a:srgbClr val="990011"/>
+                </a:solidFill>
+                <a:latin typeface="Times New Roman" pitchFamily="34" charset="0"/>
+                <a:ea typeface="Times New Roman" pitchFamily="34" charset="-122"/>
+                <a:cs typeface="Times New Roman" pitchFamily="34" charset="-120"/>
+              </a:rPr>
+              <a:t>1. Farming</a:t>
+            </a:r>
+            <a:endParaRPr lang="en-US" sz="3600" dirty="0"/>
+          </a:p>
+        </p:txBody>
+      </p:sp>
+      <p:sp>
+        <p:nvSpPr>
+          <p:cNvPr id="4" name="Text 2"/>
+          <p:cNvSpPr/>
+          <p:nvPr/>
+        </p:nvSpPr>
+        <p:spPr>
+          <a:xfrm>
+            <a:off x="365760" y="1783080"/>
+            <a:ext cx="4846320" cy="4617720"/>
+          </a:xfrm>
+          <a:prstGeom prst="rect">
+            <a:avLst/>
+          </a:prstGeom>
+          <a:noFill/>
+          <a:ln/>
+        </p:spPr>
+        <p:txBody>
+          <a:bodyPr wrap="square" lIns="0" tIns="0" rIns="0" bIns="0" rtlCol="0" anchor="t"/>
+          <a:lstStyle/>
+          <a:p>
+            <a:pPr algn="l" indent="0" marL="0">
+              <a:spcAft>
+                <a:spcPts val="800"/>
+              </a:spcAft>
+              <a:buNone/>
+            </a:pPr>
+            <a:r>
+              <a:rPr lang="en-US" sz="3600" i="1" dirty="0">
+                <a:solidFill>
+                  <a:srgbClr val="111111"/>
+                </a:solidFill>
+                <a:latin typeface="Times New Roman" pitchFamily="34" charset="0"/>
+                <a:ea typeface="Times New Roman" pitchFamily="34" charset="-122"/>
+                <a:cs typeface="Times New Roman" pitchFamily="34" charset="-120"/>
+              </a:rPr>
+              <a:t>Farming takes the following forms:</a:t>
+            </a:r>
+            <a:endParaRPr lang="en-US" sz="3600" dirty="0"/>
+          </a:p>
+          <a:p>
+            <a:pPr algn="l" marL="342900" indent="-342900">
+              <a:spcAft>
+                <a:spcPts val="800"/>
+              </a:spcAft>
+              <a:buSzPct val="100000"/>
+              <a:buChar char="•"/>
+            </a:pPr>
+            <a:r>
+              <a:rPr lang="en-US" sz="3600" b="1" dirty="0">
+                <a:solidFill>
+                  <a:srgbClr val="111111"/>
+                </a:solidFill>
+                <a:latin typeface="Times New Roman" pitchFamily="34" charset="0"/>
+                <a:ea typeface="Times New Roman" pitchFamily="34" charset="-122"/>
+                <a:cs typeface="Times New Roman" pitchFamily="34" charset="-120"/>
+              </a:rPr>
+              <a:t>Shifting cultivation: </a:t>
+            </a:r>
+            <a:pPr algn="l" marL="342900" indent="-342900">
+              <a:spcAft>
+                <a:spcPts val="800"/>
+              </a:spcAft>
+              <a:buSzPct val="100000"/>
+              <a:buChar char="•"/>
+            </a:pPr>
+            <a:r>
+              <a:rPr lang="en-US" sz="3600" dirty="0">
+                <a:solidFill>
+                  <a:srgbClr val="111111"/>
+                </a:solidFill>
+                <a:latin typeface="Times New Roman" pitchFamily="34" charset="0"/>
+                <a:ea typeface="Times New Roman" pitchFamily="34" charset="-122"/>
+                <a:cs typeface="Times New Roman" pitchFamily="34" charset="-120"/>
+              </a:rPr>
+              <a:t>Farmers clear, burn, farm and then move.</a:t>
+            </a:r>
+            <a:endParaRPr lang="en-US" sz="3600" dirty="0"/>
+          </a:p>
+        </p:txBody>
+      </p:sp>
       <p:pic>
         <p:nvPicPr>
-          <p:cNvPr id="3" name="Image 0" descr="/home/claude/f4/img/minesec_sheet.png">    </p:cNvPr>
+          <p:cNvPr id="5" name="Image 0" descr="/home/claude/f4/img/v2/f2t_clearing.jpg">    </p:cNvPr>
           <p:cNvPicPr>
             <a:picLocks noChangeAspect="1"/>
           </p:cNvPicPr>
@@ -13985,8 +14200,8 @@
         </p:blipFill>
         <p:spPr>
           <a:xfrm>
-            <a:off x="0" y="658368"/>
-            <a:ext cx="1463040" cy="5833872"/>
+            <a:off x="5349240" y="2071212"/>
+            <a:ext cx="6659575" cy="3693983"/>
           </a:xfrm>
           <a:prstGeom prst="rect">
             <a:avLst/>
@@ -13995,14 +14210,14 @@
       </p:pic>
       <p:sp>
         <p:nvSpPr>
-          <p:cNvPr id="4" name="Text 1"/>
+          <p:cNvPr id="6" name="Text 3"/>
           <p:cNvSpPr/>
           <p:nvPr/>
         </p:nvSpPr>
         <p:spPr>
           <a:xfrm>
-            <a:off x="1691640" y="1005840"/>
-            <a:ext cx="10180015" cy="731520"/>
+            <a:off x="5349240" y="6089904"/>
+            <a:ext cx="6659575" cy="347472"/>
           </a:xfrm>
           <a:prstGeom prst="rect">
             <a:avLst/>
@@ -14011,142 +14226,24 @@
           <a:ln/>
         </p:spPr>
         <p:txBody>
-          <a:bodyPr wrap="square" lIns="0" tIns="0" rIns="0" bIns="0" rtlCol="0" anchor="ctr">
-            <a:normAutofit/>
-          </a:bodyPr>
+          <a:bodyPr wrap="square" lIns="0" tIns="0" rIns="0" bIns="0" rtlCol="0" anchor="ctr"/>
           <a:lstStyle/>
           <a:p>
             <a:pPr algn="ctr" indent="0" marL="0">
               <a:buNone/>
             </a:pPr>
             <a:r>
-              <a:rPr lang="en-US" sz="3600" b="1" dirty="0">
-                <a:solidFill>
-                  <a:srgbClr val="990011"/>
+              <a:rPr lang="en-US" sz="1600" i="1" dirty="0">
+                <a:solidFill>
+                  <a:srgbClr val="555555"/>
                 </a:solidFill>
                 <a:latin typeface="Times New Roman" pitchFamily="34" charset="0"/>
                 <a:ea typeface="Times New Roman" pitchFamily="34" charset="-122"/>
                 <a:cs typeface="Times New Roman" pitchFamily="34" charset="-120"/>
               </a:rPr>
-              <a:t>1. Farming</a:t>
-            </a:r>
-            <a:endParaRPr lang="en-US" sz="3600" dirty="0"/>
-          </a:p>
-        </p:txBody>
-      </p:sp>
-      <p:sp>
-        <p:nvSpPr>
-          <p:cNvPr id="5" name="Text 2"/>
-          <p:cNvSpPr/>
-          <p:nvPr/>
-        </p:nvSpPr>
-        <p:spPr>
-          <a:xfrm>
-            <a:off x="1691640" y="1783080"/>
-            <a:ext cx="10180015" cy="4663440"/>
-          </a:xfrm>
-          <a:prstGeom prst="rect">
-            <a:avLst/>
-          </a:prstGeom>
-          <a:noFill/>
-          <a:ln/>
-        </p:spPr>
-        <p:txBody>
-          <a:bodyPr wrap="square" lIns="0" tIns="0" rIns="0" bIns="0" rtlCol="0" anchor="t"/>
-          <a:lstStyle/>
-          <a:p>
-            <a:pPr algn="l" indent="0" marL="0">
-              <a:spcAft>
-                <a:spcPts val="800"/>
-              </a:spcAft>
-              <a:buNone/>
-            </a:pPr>
-            <a:r>
-              <a:rPr lang="en-US" sz="4000" i="1" dirty="0">
-                <a:solidFill>
-                  <a:srgbClr val="111111"/>
-                </a:solidFill>
-                <a:latin typeface="Times New Roman" pitchFamily="34" charset="0"/>
-                <a:ea typeface="Times New Roman" pitchFamily="34" charset="-122"/>
-                <a:cs typeface="Times New Roman" pitchFamily="34" charset="-120"/>
-              </a:rPr>
-              <a:t>Farming in the Equatorial region takes the following forms:</a:t>
-            </a:r>
-            <a:endParaRPr lang="en-US" sz="4000" dirty="0"/>
-          </a:p>
-          <a:p>
-            <a:pPr algn="l" indent="0" marL="0">
-              <a:spcAft>
-                <a:spcPts val="800"/>
-              </a:spcAft>
-              <a:buNone/>
-            </a:pPr>
-            <a:r>
-              <a:rPr lang="en-US" sz="4000" b="1" dirty="0">
-                <a:solidFill>
-                  <a:srgbClr val="111111"/>
-                </a:solidFill>
-                <a:latin typeface="Times New Roman" pitchFamily="34" charset="0"/>
-                <a:ea typeface="Times New Roman" pitchFamily="34" charset="-122"/>
-                <a:cs typeface="Times New Roman" pitchFamily="34" charset="-120"/>
-              </a:rPr>
-              <a:t>Shifting cultivation: </a:t>
-            </a:r>
-            <a:pPr algn="l" indent="0" marL="0">
-              <a:spcAft>
-                <a:spcPts val="800"/>
-              </a:spcAft>
-              <a:buNone/>
-            </a:pPr>
-            <a:r>
-              <a:rPr lang="en-US" sz="4000" dirty="0">
-                <a:solidFill>
-                  <a:srgbClr val="111111"/>
-                </a:solidFill>
-                <a:latin typeface="Times New Roman" pitchFamily="34" charset="0"/>
-                <a:ea typeface="Times New Roman" pitchFamily="34" charset="-122"/>
-                <a:cs typeface="Times New Roman" pitchFamily="34" charset="-120"/>
-              </a:rPr>
-              <a:t>Farmers clear and burn a piece of forest, farm it and move when the soil becomes poor.</a:t>
-            </a:r>
-            <a:endParaRPr lang="en-US" sz="4000" dirty="0"/>
-          </a:p>
-          <a:p>
-            <a:pPr algn="l" indent="0" marL="0">
-              <a:spcAft>
-                <a:spcPts val="800"/>
-              </a:spcAft>
-              <a:buNone/>
-            </a:pPr>
-            <a:r>
-              <a:rPr lang="en-US" sz="4000" b="1" dirty="0">
-                <a:solidFill>
-                  <a:srgbClr val="111111"/>
-                </a:solidFill>
-                <a:latin typeface="Times New Roman" pitchFamily="34" charset="0"/>
-                <a:ea typeface="Times New Roman" pitchFamily="34" charset="-122"/>
-                <a:cs typeface="Times New Roman" pitchFamily="34" charset="-120"/>
-              </a:rPr>
-              <a:t>Food crops: </a:t>
-            </a:r>
-            <a:pPr algn="l" indent="0" marL="0">
-              <a:spcAft>
-                <a:spcPts val="800"/>
-              </a:spcAft>
-              <a:buNone/>
-            </a:pPr>
-            <a:r>
-              <a:rPr lang="en-US" sz="4000" dirty="0">
-                <a:solidFill>
-                  <a:srgbClr val="111111"/>
-                </a:solidFill>
-                <a:latin typeface="Times New Roman" pitchFamily="34" charset="0"/>
-                <a:ea typeface="Times New Roman" pitchFamily="34" charset="-122"/>
-                <a:cs typeface="Times New Roman" pitchFamily="34" charset="-120"/>
-              </a:rPr>
-              <a:t>Farmers grow cassava, plantains, cocoyams and maize to feed their families.</a:t>
-            </a:r>
-            <a:endParaRPr lang="en-US" sz="4000" dirty="0"/>
+              <a:t>Illustration: slash and burn</a:t>
+            </a:r>
+            <a:endParaRPr lang="en-US" sz="1600" dirty="0"/>
           </a:p>
         </p:txBody>
       </p:sp>
@@ -14321,7 +14418,7 @@
                 <a:ea typeface="Times New Roman" pitchFamily="34" charset="-122"/>
                 <a:cs typeface="Times New Roman" pitchFamily="34" charset="-120"/>
               </a:rPr>
-              <a:t>1. Farming (continued)</a:t>
+              <a:t>1. Farming</a:t>
             </a:r>
             <a:endParaRPr lang="en-US" sz="3600" dirty="0"/>
           </a:p>
@@ -14348,11 +14445,51 @@
           <a:bodyPr wrap="square" lIns="0" tIns="0" rIns="0" bIns="0" rtlCol="0" anchor="t"/>
           <a:lstStyle/>
           <a:p>
-            <a:pPr algn="l" indent="0" marL="0">
+            <a:pPr algn="l" marL="342900" indent="-342900">
               <a:spcAft>
                 <a:spcPts val="800"/>
               </a:spcAft>
-              <a:buNone/>
+              <a:buSzPct val="100000"/>
+              <a:buChar char="•"/>
+            </a:pPr>
+            <a:r>
+              <a:rPr lang="en-US" sz="4000" b="1" dirty="0">
+                <a:solidFill>
+                  <a:srgbClr val="111111"/>
+                </a:solidFill>
+                <a:latin typeface="Times New Roman" pitchFamily="34" charset="0"/>
+                <a:ea typeface="Times New Roman" pitchFamily="34" charset="-122"/>
+                <a:cs typeface="Times New Roman" pitchFamily="34" charset="-120"/>
+              </a:rPr>
+              <a:t>Food crops: </a:t>
+            </a:r>
+            <a:pPr algn="l" marL="342900" indent="-342900">
+              <a:spcAft>
+                <a:spcPts val="800"/>
+              </a:spcAft>
+              <a:buSzPct val="100000"/>
+              <a:buChar char="•"/>
+            </a:pPr>
+            <a:r>
+              <a:rPr lang="en-US" sz="4000" dirty="0">
+                <a:solidFill>
+                  <a:srgbClr val="111111"/>
+                </a:solidFill>
+                <a:latin typeface="Times New Roman" pitchFamily="34" charset="0"/>
+                <a:ea typeface="Times New Roman" pitchFamily="34" charset="-122"/>
+                <a:cs typeface="Times New Roman" pitchFamily="34" charset="-120"/>
+              </a:rPr>
+              <a:t>Cassava, plantains, cocoyams and maize.</a:t>
+            </a:r>
+            <a:endParaRPr lang="en-US" sz="4000" dirty="0"/>
+          </a:p>
+          <a:p>
+            <a:pPr algn="l" marL="342900" indent="-342900">
+              <a:spcAft>
+                <a:spcPts val="800"/>
+              </a:spcAft>
+              <a:buSzPct val="100000"/>
+              <a:buChar char="•"/>
             </a:pPr>
             <a:r>
               <a:rPr lang="en-US" sz="4000" b="1" dirty="0">
@@ -14365,11 +14502,12 @@
               </a:rPr>
               <a:t>Cash crops: </a:t>
             </a:r>
-            <a:pPr algn="l" indent="0" marL="0">
+            <a:pPr algn="l" marL="342900" indent="-342900">
               <a:spcAft>
                 <a:spcPts val="800"/>
               </a:spcAft>
-              <a:buNone/>
+              <a:buSzPct val="100000"/>
+              <a:buChar char="•"/>
             </a:pPr>
             <a:r>
               <a:rPr lang="en-US" sz="4000" dirty="0">
@@ -14380,44 +14518,7 @@
                 <a:ea typeface="Times New Roman" pitchFamily="34" charset="-122"/>
                 <a:cs typeface="Times New Roman" pitchFamily="34" charset="-120"/>
               </a:rPr>
-              <a:t>Small farmers grow cocoa and coffee to sell.</a:t>
-            </a:r>
-            <a:endParaRPr lang="en-US" sz="4000" dirty="0"/>
-          </a:p>
-          <a:p>
-            <a:pPr algn="l" indent="0" marL="0">
-              <a:spcAft>
-                <a:spcPts val="800"/>
-              </a:spcAft>
-              <a:buNone/>
-            </a:pPr>
-            <a:r>
-              <a:rPr lang="en-US" sz="4000" b="1" dirty="0">
-                <a:solidFill>
-                  <a:srgbClr val="111111"/>
-                </a:solidFill>
-                <a:latin typeface="Times New Roman" pitchFamily="34" charset="0"/>
-                <a:ea typeface="Times New Roman" pitchFamily="34" charset="-122"/>
-                <a:cs typeface="Times New Roman" pitchFamily="34" charset="-120"/>
-              </a:rPr>
-              <a:t>Plantations: </a:t>
-            </a:r>
-            <a:pPr algn="l" indent="0" marL="0">
-              <a:spcAft>
-                <a:spcPts val="800"/>
-              </a:spcAft>
-              <a:buNone/>
-            </a:pPr>
-            <a:r>
-              <a:rPr lang="en-US" sz="4000" dirty="0">
-                <a:solidFill>
-                  <a:srgbClr val="111111"/>
-                </a:solidFill>
-                <a:latin typeface="Times New Roman" pitchFamily="34" charset="0"/>
-                <a:ea typeface="Times New Roman" pitchFamily="34" charset="-122"/>
-                <a:cs typeface="Times New Roman" pitchFamily="34" charset="-120"/>
-              </a:rPr>
-              <a:t>Large companies such as the CDC and SOCAPALM grow oil palm, rubber and bananas on very large farms.</a:t>
+              <a:t>Cocoa and coffee on small farms.</a:t>
             </a:r>
             <a:endParaRPr lang="en-US" sz="4000" dirty="0"/>
           </a:p>
@@ -14535,9 +14636,111 @@
           </a:p>
         </p:txBody>
       </p:sp>
+      <p:sp>
+        <p:nvSpPr>
+          <p:cNvPr id="3" name="Text 1"/>
+          <p:cNvSpPr/>
+          <p:nvPr/>
+        </p:nvSpPr>
+        <p:spPr>
+          <a:xfrm>
+            <a:off x="365760" y="1005840"/>
+            <a:ext cx="11460175" cy="731520"/>
+          </a:xfrm>
+          <a:prstGeom prst="rect">
+            <a:avLst/>
+          </a:prstGeom>
+          <a:noFill/>
+          <a:ln/>
+        </p:spPr>
+        <p:txBody>
+          <a:bodyPr wrap="square" lIns="0" tIns="0" rIns="0" bIns="0" rtlCol="0" anchor="ctr">
+            <a:normAutofit/>
+          </a:bodyPr>
+          <a:lstStyle/>
+          <a:p>
+            <a:pPr algn="ctr" indent="0" marL="0">
+              <a:buNone/>
+            </a:pPr>
+            <a:r>
+              <a:rPr lang="en-US" sz="3600" b="1" dirty="0">
+                <a:solidFill>
+                  <a:srgbClr val="990011"/>
+                </a:solidFill>
+                <a:latin typeface="Times New Roman" pitchFamily="34" charset="0"/>
+                <a:ea typeface="Times New Roman" pitchFamily="34" charset="-122"/>
+                <a:cs typeface="Times New Roman" pitchFamily="34" charset="-120"/>
+              </a:rPr>
+              <a:t>1. Farming</a:t>
+            </a:r>
+            <a:endParaRPr lang="en-US" sz="3600" dirty="0"/>
+          </a:p>
+        </p:txBody>
+      </p:sp>
+      <p:sp>
+        <p:nvSpPr>
+          <p:cNvPr id="4" name="Text 2"/>
+          <p:cNvSpPr/>
+          <p:nvPr/>
+        </p:nvSpPr>
+        <p:spPr>
+          <a:xfrm>
+            <a:off x="365760" y="1783080"/>
+            <a:ext cx="4846320" cy="4617720"/>
+          </a:xfrm>
+          <a:prstGeom prst="rect">
+            <a:avLst/>
+          </a:prstGeom>
+          <a:noFill/>
+          <a:ln/>
+        </p:spPr>
+        <p:txBody>
+          <a:bodyPr wrap="square" lIns="0" tIns="0" rIns="0" bIns="0" rtlCol="0" anchor="t"/>
+          <a:lstStyle/>
+          <a:p>
+            <a:pPr algn="l" marL="342900" indent="-342900">
+              <a:spcAft>
+                <a:spcPts val="800"/>
+              </a:spcAft>
+              <a:buSzPct val="100000"/>
+              <a:buChar char="•"/>
+            </a:pPr>
+            <a:r>
+              <a:rPr lang="en-US" sz="3600" b="1" dirty="0">
+                <a:solidFill>
+                  <a:srgbClr val="111111"/>
+                </a:solidFill>
+                <a:latin typeface="Times New Roman" pitchFamily="34" charset="0"/>
+                <a:ea typeface="Times New Roman" pitchFamily="34" charset="-122"/>
+                <a:cs typeface="Times New Roman" pitchFamily="34" charset="-120"/>
+              </a:rPr>
+              <a:t>Plantations: </a:t>
+            </a:r>
+            <a:pPr algn="l" marL="342900" indent="-342900">
+              <a:spcAft>
+                <a:spcPts val="800"/>
+              </a:spcAft>
+              <a:buSzPct val="100000"/>
+              <a:buChar char="•"/>
+            </a:pPr>
+            <a:r>
+              <a:rPr lang="en-US" sz="3600" dirty="0">
+                <a:solidFill>
+                  <a:srgbClr val="111111"/>
+                </a:solidFill>
+                <a:latin typeface="Times New Roman" pitchFamily="34" charset="0"/>
+                <a:ea typeface="Times New Roman" pitchFamily="34" charset="-122"/>
+                <a:cs typeface="Times New Roman" pitchFamily="34" charset="-120"/>
+              </a:rPr>
+              <a:t>Oil palm, rubber and bananas (CDC, SOCAPALM).</a:t>
+            </a:r>
+            <a:endParaRPr lang="en-US" sz="3600" dirty="0"/>
+          </a:p>
+        </p:txBody>
+      </p:sp>
       <p:pic>
         <p:nvPicPr>
-          <p:cNvPr id="3" name="Image 0" descr="/home/claude/f4/img/minesec_sheet.png">    </p:cNvPr>
+          <p:cNvPr id="5" name="Image 0" descr="/home/claude/f4/img/v2/lsa_oilpalm.jpg">    </p:cNvPr>
           <p:cNvPicPr>
             <a:picLocks noChangeAspect="1"/>
           </p:cNvPicPr>
@@ -14551,8 +14754,8 @@
         </p:blipFill>
         <p:spPr>
           <a:xfrm>
-            <a:off x="0" y="658368"/>
-            <a:ext cx="3840480" cy="5833872"/>
+            <a:off x="5349240" y="2071212"/>
+            <a:ext cx="6659575" cy="3693983"/>
           </a:xfrm>
           <a:prstGeom prst="rect">
             <a:avLst/>
@@ -14561,14 +14764,14 @@
       </p:pic>
       <p:sp>
         <p:nvSpPr>
-          <p:cNvPr id="4" name="Text 1"/>
+          <p:cNvPr id="6" name="Text 3"/>
           <p:cNvSpPr/>
           <p:nvPr/>
         </p:nvSpPr>
         <p:spPr>
           <a:xfrm>
-            <a:off x="4069080" y="1005840"/>
-            <a:ext cx="7802575" cy="731520"/>
+            <a:off x="5349240" y="6089904"/>
+            <a:ext cx="6659575" cy="347472"/>
           </a:xfrm>
           <a:prstGeom prst="rect">
             <a:avLst/>
@@ -14577,142 +14780,24 @@
           <a:ln/>
         </p:spPr>
         <p:txBody>
-          <a:bodyPr wrap="square" lIns="0" tIns="0" rIns="0" bIns="0" rtlCol="0" anchor="ctr">
-            <a:normAutofit/>
-          </a:bodyPr>
+          <a:bodyPr wrap="square" lIns="0" tIns="0" rIns="0" bIns="0" rtlCol="0" anchor="ctr"/>
           <a:lstStyle/>
           <a:p>
             <a:pPr algn="ctr" indent="0" marL="0">
               <a:buNone/>
             </a:pPr>
             <a:r>
-              <a:rPr lang="en-US" sz="3600" b="1" dirty="0">
-                <a:solidFill>
-                  <a:srgbClr val="990011"/>
+              <a:rPr lang="en-US" sz="1600" i="1" dirty="0">
+                <a:solidFill>
+                  <a:srgbClr val="555555"/>
                 </a:solidFill>
                 <a:latin typeface="Times New Roman" pitchFamily="34" charset="0"/>
                 <a:ea typeface="Times New Roman" pitchFamily="34" charset="-122"/>
                 <a:cs typeface="Times New Roman" pitchFamily="34" charset="-120"/>
               </a:rPr>
-              <a:t>2. Forestry and Lumbering</a:t>
-            </a:r>
-            <a:endParaRPr lang="en-US" sz="3600" dirty="0"/>
-          </a:p>
-        </p:txBody>
-      </p:sp>
-      <p:sp>
-        <p:nvSpPr>
-          <p:cNvPr id="5" name="Text 2"/>
-          <p:cNvSpPr/>
-          <p:nvPr/>
-        </p:nvSpPr>
-        <p:spPr>
-          <a:xfrm>
-            <a:off x="4069080" y="1783080"/>
-            <a:ext cx="7802575" cy="4663440"/>
-          </a:xfrm>
-          <a:prstGeom prst="rect">
-            <a:avLst/>
-          </a:prstGeom>
-          <a:noFill/>
-          <a:ln/>
-        </p:spPr>
-        <p:txBody>
-          <a:bodyPr wrap="square" lIns="0" tIns="0" rIns="0" bIns="0" rtlCol="0" anchor="t"/>
-          <a:lstStyle/>
-          <a:p>
-            <a:pPr algn="l" indent="0" marL="0">
-              <a:spcAft>
-                <a:spcPts val="800"/>
-              </a:spcAft>
-              <a:buNone/>
-            </a:pPr>
-            <a:r>
-              <a:rPr lang="en-US" sz="4000" i="1" dirty="0">
-                <a:solidFill>
-                  <a:srgbClr val="111111"/>
-                </a:solidFill>
-                <a:latin typeface="Times New Roman" pitchFamily="34" charset="0"/>
-                <a:ea typeface="Times New Roman" pitchFamily="34" charset="-122"/>
-                <a:cs typeface="Times New Roman" pitchFamily="34" charset="-120"/>
-              </a:rPr>
-              <a:t>Lumbering is carried out in the following stages:</a:t>
-            </a:r>
-            <a:endParaRPr lang="en-US" sz="4000" dirty="0"/>
-          </a:p>
-          <a:p>
-            <a:pPr algn="l" indent="0" marL="0">
-              <a:spcAft>
-                <a:spcPts val="800"/>
-              </a:spcAft>
-              <a:buNone/>
-            </a:pPr>
-            <a:r>
-              <a:rPr lang="en-US" sz="4000" b="1" dirty="0">
-                <a:solidFill>
-                  <a:srgbClr val="111111"/>
-                </a:solidFill>
-                <a:latin typeface="Times New Roman" pitchFamily="34" charset="0"/>
-                <a:ea typeface="Times New Roman" pitchFamily="34" charset="-122"/>
-                <a:cs typeface="Times New Roman" pitchFamily="34" charset="-120"/>
-              </a:rPr>
-              <a:t>Felling: </a:t>
-            </a:r>
-            <a:pPr algn="l" indent="0" marL="0">
-              <a:spcAft>
-                <a:spcPts val="800"/>
-              </a:spcAft>
-              <a:buNone/>
-            </a:pPr>
-            <a:r>
-              <a:rPr lang="en-US" sz="4000" dirty="0">
-                <a:solidFill>
-                  <a:srgbClr val="111111"/>
-                </a:solidFill>
-                <a:latin typeface="Times New Roman" pitchFamily="34" charset="0"/>
-                <a:ea typeface="Times New Roman" pitchFamily="34" charset="-122"/>
-                <a:cs typeface="Times New Roman" pitchFamily="34" charset="-120"/>
-              </a:rPr>
-              <a:t>Workers cut the big hardwood trees with chainsaws.</a:t>
-            </a:r>
-            <a:endParaRPr lang="en-US" sz="4000" dirty="0"/>
-          </a:p>
-          <a:p>
-            <a:pPr algn="l" indent="0" marL="0">
-              <a:spcAft>
-                <a:spcPts val="800"/>
-              </a:spcAft>
-              <a:buNone/>
-            </a:pPr>
-            <a:r>
-              <a:rPr lang="en-US" sz="4000" b="1" dirty="0">
-                <a:solidFill>
-                  <a:srgbClr val="111111"/>
-                </a:solidFill>
-                <a:latin typeface="Times New Roman" pitchFamily="34" charset="0"/>
-                <a:ea typeface="Times New Roman" pitchFamily="34" charset="-122"/>
-                <a:cs typeface="Times New Roman" pitchFamily="34" charset="-120"/>
-              </a:rPr>
-              <a:t>Transport: </a:t>
-            </a:r>
-            <a:pPr algn="l" indent="0" marL="0">
-              <a:spcAft>
-                <a:spcPts val="800"/>
-              </a:spcAft>
-              <a:buNone/>
-            </a:pPr>
-            <a:r>
-              <a:rPr lang="en-US" sz="4000" dirty="0">
-                <a:solidFill>
-                  <a:srgbClr val="111111"/>
-                </a:solidFill>
-                <a:latin typeface="Times New Roman" pitchFamily="34" charset="0"/>
-                <a:ea typeface="Times New Roman" pitchFamily="34" charset="-122"/>
-                <a:cs typeface="Times New Roman" pitchFamily="34" charset="-120"/>
-              </a:rPr>
-              <a:t>The logs are dragged out by tractors and carried by lorries or trains.</a:t>
-            </a:r>
-            <a:endParaRPr lang="en-US" sz="4000" dirty="0"/>
+              <a:t>Illustration: an oil palm plantation</a:t>
+            </a:r>
+            <a:endParaRPr lang="en-US" sz="1600" dirty="0"/>
           </a:p>
         </p:txBody>
       </p:sp>
@@ -14887,7 +14972,7 @@
                 <a:ea typeface="Times New Roman" pitchFamily="34" charset="-122"/>
                 <a:cs typeface="Times New Roman" pitchFamily="34" charset="-120"/>
               </a:rPr>
-              <a:t>2. Forestry and Lumbering (continued)</a:t>
+              <a:t>2. Forestry and Lumbering</a:t>
             </a:r>
             <a:endParaRPr lang="en-US" sz="3600" dirty="0"/>
           </a:p>
@@ -14921,7 +15006,7 @@
               <a:buNone/>
             </a:pPr>
             <a:r>
-              <a:rPr lang="en-US" sz="4000" b="1" dirty="0">
+              <a:rPr lang="en-US" sz="4000" i="1" dirty="0">
                 <a:solidFill>
                   <a:srgbClr val="111111"/>
                 </a:solidFill>
@@ -14929,16 +15014,20 @@
                 <a:ea typeface="Times New Roman" pitchFamily="34" charset="-122"/>
                 <a:cs typeface="Times New Roman" pitchFamily="34" charset="-120"/>
               </a:rPr>
-              <a:t>Processing and export: </a:t>
-            </a:r>
-            <a:pPr algn="l" indent="0" marL="0">
+              <a:t>Lumbering has the following stages:</a:t>
+            </a:r>
+            <a:endParaRPr lang="en-US" sz="4000" dirty="0"/>
+          </a:p>
+          <a:p>
+            <a:pPr algn="l" marL="342900" indent="-342900">
               <a:spcAft>
                 <a:spcPts val="800"/>
               </a:spcAft>
-              <a:buNone/>
+              <a:buSzPct val="100000"/>
+              <a:buChar char="•"/>
             </a:pPr>
             <a:r>
-              <a:rPr lang="en-US" sz="4000" dirty="0">
+              <a:rPr lang="en-US" sz="4000" b="1" dirty="0">
                 <a:solidFill>
                   <a:srgbClr val="111111"/>
                 </a:solidFill>
@@ -14946,7 +15035,64 @@
                 <a:ea typeface="Times New Roman" pitchFamily="34" charset="-122"/>
                 <a:cs typeface="Times New Roman" pitchFamily="34" charset="-120"/>
               </a:rPr>
-              <a:t>The logs are sawn in sawmills or exported through the ports of Douala and Kribi.</a:t>
+              <a:t>Felling: </a:t>
+            </a:r>
+            <a:pPr algn="l" marL="342900" indent="-342900">
+              <a:spcAft>
+                <a:spcPts val="800"/>
+              </a:spcAft>
+              <a:buSzPct val="100000"/>
+              <a:buChar char="•"/>
+            </a:pPr>
+            <a:r>
+              <a:rPr lang="en-US" sz="4000" dirty="0">
+                <a:solidFill>
+                  <a:srgbClr val="111111"/>
+                </a:solidFill>
+                <a:latin typeface="Times New Roman" pitchFamily="34" charset="0"/>
+                <a:ea typeface="Times New Roman" pitchFamily="34" charset="-122"/>
+                <a:cs typeface="Times New Roman" pitchFamily="34" charset="-120"/>
+              </a:rPr>
+              <a:t>Trees are cut with chainsaws.</a:t>
+            </a:r>
+            <a:endParaRPr lang="en-US" sz="4000" dirty="0"/>
+          </a:p>
+          <a:p>
+            <a:pPr algn="l" marL="342900" indent="-342900">
+              <a:spcAft>
+                <a:spcPts val="800"/>
+              </a:spcAft>
+              <a:buSzPct val="100000"/>
+              <a:buChar char="•"/>
+            </a:pPr>
+            <a:r>
+              <a:rPr lang="en-US" sz="4000" b="1" dirty="0">
+                <a:solidFill>
+                  <a:srgbClr val="111111"/>
+                </a:solidFill>
+                <a:latin typeface="Times New Roman" pitchFamily="34" charset="0"/>
+                <a:ea typeface="Times New Roman" pitchFamily="34" charset="-122"/>
+                <a:cs typeface="Times New Roman" pitchFamily="34" charset="-120"/>
+              </a:rPr>
+              <a:t>Transport: </a:t>
+            </a:r>
+            <a:pPr algn="l" marL="342900" indent="-342900">
+              <a:spcAft>
+                <a:spcPts val="800"/>
+              </a:spcAft>
+              <a:buSzPct val="100000"/>
+              <a:buChar char="•"/>
+            </a:pPr>
+            <a:r>
+              <a:rPr lang="en-US" sz="4000" dirty="0">
+                <a:solidFill>
+                  <a:srgbClr val="111111"/>
+                </a:solidFill>
+                <a:latin typeface="Times New Roman" pitchFamily="34" charset="0"/>
+                <a:ea typeface="Times New Roman" pitchFamily="34" charset="-122"/>
+                <a:cs typeface="Times New Roman" pitchFamily="34" charset="-120"/>
+              </a:rPr>
+              <a:t>Logs are carried by lorries or trains.</a:t>
             </a:r>
             <a:endParaRPr lang="en-US" sz="4000" dirty="0"/>
           </a:p>
@@ -15303,9 +15449,111 @@
           </a:p>
         </p:txBody>
       </p:sp>
+      <p:sp>
+        <p:nvSpPr>
+          <p:cNvPr id="3" name="Text 1"/>
+          <p:cNvSpPr/>
+          <p:nvPr/>
+        </p:nvSpPr>
+        <p:spPr>
+          <a:xfrm>
+            <a:off x="365760" y="1005840"/>
+            <a:ext cx="11460175" cy="731520"/>
+          </a:xfrm>
+          <a:prstGeom prst="rect">
+            <a:avLst/>
+          </a:prstGeom>
+          <a:noFill/>
+          <a:ln/>
+        </p:spPr>
+        <p:txBody>
+          <a:bodyPr wrap="square" lIns="0" tIns="0" rIns="0" bIns="0" rtlCol="0" anchor="ctr">
+            <a:normAutofit/>
+          </a:bodyPr>
+          <a:lstStyle/>
+          <a:p>
+            <a:pPr algn="ctr" indent="0" marL="0">
+              <a:buNone/>
+            </a:pPr>
+            <a:r>
+              <a:rPr lang="en-US" sz="3600" b="1" dirty="0">
+                <a:solidFill>
+                  <a:srgbClr val="990011"/>
+                </a:solidFill>
+                <a:latin typeface="Times New Roman" pitchFamily="34" charset="0"/>
+                <a:ea typeface="Times New Roman" pitchFamily="34" charset="-122"/>
+                <a:cs typeface="Times New Roman" pitchFamily="34" charset="-120"/>
+              </a:rPr>
+              <a:t>2. Forestry and Lumbering</a:t>
+            </a:r>
+            <a:endParaRPr lang="en-US" sz="3600" dirty="0"/>
+          </a:p>
+        </p:txBody>
+      </p:sp>
+      <p:sp>
+        <p:nvSpPr>
+          <p:cNvPr id="4" name="Text 2"/>
+          <p:cNvSpPr/>
+          <p:nvPr/>
+        </p:nvSpPr>
+        <p:spPr>
+          <a:xfrm>
+            <a:off x="365760" y="1783080"/>
+            <a:ext cx="4846320" cy="4617720"/>
+          </a:xfrm>
+          <a:prstGeom prst="rect">
+            <a:avLst/>
+          </a:prstGeom>
+          <a:noFill/>
+          <a:ln/>
+        </p:spPr>
+        <p:txBody>
+          <a:bodyPr wrap="square" lIns="0" tIns="0" rIns="0" bIns="0" rtlCol="0" anchor="t"/>
+          <a:lstStyle/>
+          <a:p>
+            <a:pPr algn="l" marL="342900" indent="-342900">
+              <a:spcAft>
+                <a:spcPts val="800"/>
+              </a:spcAft>
+              <a:buSzPct val="100000"/>
+              <a:buChar char="•"/>
+            </a:pPr>
+            <a:r>
+              <a:rPr lang="en-US" sz="3600" b="1" dirty="0">
+                <a:solidFill>
+                  <a:srgbClr val="111111"/>
+                </a:solidFill>
+                <a:latin typeface="Times New Roman" pitchFamily="34" charset="0"/>
+                <a:ea typeface="Times New Roman" pitchFamily="34" charset="-122"/>
+                <a:cs typeface="Times New Roman" pitchFamily="34" charset="-120"/>
+              </a:rPr>
+              <a:t>Sawing and export: </a:t>
+            </a:r>
+            <a:pPr algn="l" marL="342900" indent="-342900">
+              <a:spcAft>
+                <a:spcPts val="800"/>
+              </a:spcAft>
+              <a:buSzPct val="100000"/>
+              <a:buChar char="•"/>
+            </a:pPr>
+            <a:r>
+              <a:rPr lang="en-US" sz="3600" dirty="0">
+                <a:solidFill>
+                  <a:srgbClr val="111111"/>
+                </a:solidFill>
+                <a:latin typeface="Times New Roman" pitchFamily="34" charset="0"/>
+                <a:ea typeface="Times New Roman" pitchFamily="34" charset="-122"/>
+                <a:cs typeface="Times New Roman" pitchFamily="34" charset="-120"/>
+              </a:rPr>
+              <a:t>Logs are sawn in sawmills or exported from Douala and Kribi.</a:t>
+            </a:r>
+            <a:endParaRPr lang="en-US" sz="3600" dirty="0"/>
+          </a:p>
+        </p:txBody>
+      </p:sp>
       <p:pic>
         <p:nvPicPr>
-          <p:cNvPr id="3" name="Image 0" descr="/home/claude/f4/img/minesec_sheet.png">    </p:cNvPr>
+          <p:cNvPr id="5" name="Image 0" descr="/home/claude/f4/img/v2/usa_sawmill.jpg">    </p:cNvPr>
           <p:cNvPicPr>
             <a:picLocks noChangeAspect="1"/>
           </p:cNvPicPr>
@@ -15319,8 +15567,8 @@
         </p:blipFill>
         <p:spPr>
           <a:xfrm>
-            <a:off x="0" y="658368"/>
-            <a:ext cx="1463040" cy="5833872"/>
+            <a:off x="5349240" y="2071212"/>
+            <a:ext cx="6659575" cy="3693983"/>
           </a:xfrm>
           <a:prstGeom prst="rect">
             <a:avLst/>
@@ -15329,14 +15577,14 @@
       </p:pic>
       <p:sp>
         <p:nvSpPr>
-          <p:cNvPr id="4" name="Text 1"/>
+          <p:cNvPr id="6" name="Text 3"/>
           <p:cNvSpPr/>
           <p:nvPr/>
         </p:nvSpPr>
         <p:spPr>
           <a:xfrm>
-            <a:off x="1691640" y="1005840"/>
-            <a:ext cx="10180015" cy="731520"/>
+            <a:off x="5349240" y="6089904"/>
+            <a:ext cx="6659575" cy="347472"/>
           </a:xfrm>
           <a:prstGeom prst="rect">
             <a:avLst/>
@@ -15345,142 +15593,24 @@
           <a:ln/>
         </p:spPr>
         <p:txBody>
-          <a:bodyPr wrap="square" lIns="0" tIns="0" rIns="0" bIns="0" rtlCol="0" anchor="ctr">
-            <a:normAutofit/>
-          </a:bodyPr>
+          <a:bodyPr wrap="square" lIns="0" tIns="0" rIns="0" bIns="0" rtlCol="0" anchor="ctr"/>
           <a:lstStyle/>
           <a:p>
             <a:pPr algn="ctr" indent="0" marL="0">
               <a:buNone/>
             </a:pPr>
             <a:r>
-              <a:rPr lang="en-US" sz="3600" b="1" dirty="0">
-                <a:solidFill>
-                  <a:srgbClr val="990011"/>
+              <a:rPr lang="en-US" sz="1600" i="1" dirty="0">
+                <a:solidFill>
+                  <a:srgbClr val="555555"/>
                 </a:solidFill>
                 <a:latin typeface="Times New Roman" pitchFamily="34" charset="0"/>
                 <a:ea typeface="Times New Roman" pitchFamily="34" charset="-122"/>
                 <a:cs typeface="Times New Roman" pitchFamily="34" charset="-120"/>
               </a:rPr>
-              <a:t>3. Hunting, Gathering and Other Activities</a:t>
-            </a:r>
-            <a:endParaRPr lang="en-US" sz="3600" dirty="0"/>
-          </a:p>
-        </p:txBody>
-      </p:sp>
-      <p:sp>
-        <p:nvSpPr>
-          <p:cNvPr id="5" name="Text 2"/>
-          <p:cNvSpPr/>
-          <p:nvPr/>
-        </p:nvSpPr>
-        <p:spPr>
-          <a:xfrm>
-            <a:off x="1691640" y="1783080"/>
-            <a:ext cx="10180015" cy="4663440"/>
-          </a:xfrm>
-          <a:prstGeom prst="rect">
-            <a:avLst/>
-          </a:prstGeom>
-          <a:noFill/>
-          <a:ln/>
-        </p:spPr>
-        <p:txBody>
-          <a:bodyPr wrap="square" lIns="0" tIns="0" rIns="0" bIns="0" rtlCol="0" anchor="t"/>
-          <a:lstStyle/>
-          <a:p>
-            <a:pPr algn="l" indent="0" marL="0">
-              <a:spcAft>
-                <a:spcPts val="800"/>
-              </a:spcAft>
-              <a:buNone/>
-            </a:pPr>
-            <a:r>
-              <a:rPr lang="en-US" sz="4000" i="1" dirty="0">
-                <a:solidFill>
-                  <a:srgbClr val="111111"/>
-                </a:solidFill>
-                <a:latin typeface="Times New Roman" pitchFamily="34" charset="0"/>
-                <a:ea typeface="Times New Roman" pitchFamily="34" charset="-122"/>
-                <a:cs typeface="Times New Roman" pitchFamily="34" charset="-120"/>
-              </a:rPr>
-              <a:t>People also carry out the following activities:</a:t>
-            </a:r>
-            <a:endParaRPr lang="en-US" sz="4000" dirty="0"/>
-          </a:p>
-          <a:p>
-            <a:pPr algn="l" indent="0" marL="0">
-              <a:spcAft>
-                <a:spcPts val="800"/>
-              </a:spcAft>
-              <a:buNone/>
-            </a:pPr>
-            <a:r>
-              <a:rPr lang="en-US" sz="4000" b="1" dirty="0">
-                <a:solidFill>
-                  <a:srgbClr val="111111"/>
-                </a:solidFill>
-                <a:latin typeface="Times New Roman" pitchFamily="34" charset="0"/>
-                <a:ea typeface="Times New Roman" pitchFamily="34" charset="-122"/>
-                <a:cs typeface="Times New Roman" pitchFamily="34" charset="-120"/>
-              </a:rPr>
-              <a:t>Hunting: </a:t>
-            </a:r>
-            <a:pPr algn="l" indent="0" marL="0">
-              <a:spcAft>
-                <a:spcPts val="800"/>
-              </a:spcAft>
-              <a:buNone/>
-            </a:pPr>
-            <a:r>
-              <a:rPr lang="en-US" sz="4000" dirty="0">
-                <a:solidFill>
-                  <a:srgbClr val="111111"/>
-                </a:solidFill>
-                <a:latin typeface="Times New Roman" pitchFamily="34" charset="0"/>
-                <a:ea typeface="Times New Roman" pitchFamily="34" charset="-122"/>
-                <a:cs typeface="Times New Roman" pitchFamily="34" charset="-120"/>
-              </a:rPr>
-              <a:t>People such as the Baka hunt animals for food, but hunting is controlled by law.</a:t>
-            </a:r>
-            <a:endParaRPr lang="en-US" sz="4000" dirty="0"/>
-          </a:p>
-          <a:p>
-            <a:pPr algn="l" indent="0" marL="0">
-              <a:spcAft>
-                <a:spcPts val="800"/>
-              </a:spcAft>
-              <a:buNone/>
-            </a:pPr>
-            <a:r>
-              <a:rPr lang="en-US" sz="4000" b="1" dirty="0">
-                <a:solidFill>
-                  <a:srgbClr val="111111"/>
-                </a:solidFill>
-                <a:latin typeface="Times New Roman" pitchFamily="34" charset="0"/>
-                <a:ea typeface="Times New Roman" pitchFamily="34" charset="-122"/>
-                <a:cs typeface="Times New Roman" pitchFamily="34" charset="-120"/>
-              </a:rPr>
-              <a:t>Gathering: </a:t>
-            </a:r>
-            <a:pPr algn="l" indent="0" marL="0">
-              <a:spcAft>
-                <a:spcPts val="800"/>
-              </a:spcAft>
-              <a:buNone/>
-            </a:pPr>
-            <a:r>
-              <a:rPr lang="en-US" sz="4000" dirty="0">
-                <a:solidFill>
-                  <a:srgbClr val="111111"/>
-                </a:solidFill>
-                <a:latin typeface="Times New Roman" pitchFamily="34" charset="0"/>
-                <a:ea typeface="Times New Roman" pitchFamily="34" charset="-122"/>
-                <a:cs typeface="Times New Roman" pitchFamily="34" charset="-120"/>
-              </a:rPr>
-              <a:t>People gather fruits, honey, mushrooms, eru and njansang in the forest.</a:t>
-            </a:r>
-            <a:endParaRPr lang="en-US" sz="4000" dirty="0"/>
+              <a:t>Illustration: a sawmill</a:t>
+            </a:r>
+            <a:endParaRPr lang="en-US" sz="1600" dirty="0"/>
           </a:p>
         </p:txBody>
       </p:sp>
@@ -15655,7 +15785,7 @@
                 <a:ea typeface="Times New Roman" pitchFamily="34" charset="-122"/>
                 <a:cs typeface="Times New Roman" pitchFamily="34" charset="-120"/>
               </a:rPr>
-              <a:t>3. Hunting, Gathering and Other Activities (continued)</a:t>
+              <a:t>3. Hunting and Other Activities</a:t>
             </a:r>
             <a:endParaRPr lang="en-US" sz="3600" dirty="0"/>
           </a:p>
@@ -15689,7 +15819,7 @@
               <a:buNone/>
             </a:pPr>
             <a:r>
-              <a:rPr lang="en-US" sz="4000" b="1" dirty="0">
+              <a:rPr lang="en-US" sz="4000" i="1" dirty="0">
                 <a:solidFill>
                   <a:srgbClr val="111111"/>
                 </a:solidFill>
@@ -15697,16 +15827,20 @@
                 <a:ea typeface="Times New Roman" pitchFamily="34" charset="-122"/>
                 <a:cs typeface="Times New Roman" pitchFamily="34" charset="-120"/>
               </a:rPr>
-              <a:t>Fishing and mining: </a:t>
-            </a:r>
-            <a:pPr algn="l" indent="0" marL="0">
+              <a:t>People also carry out the following activities:</a:t>
+            </a:r>
+            <a:endParaRPr lang="en-US" sz="4000" dirty="0"/>
+          </a:p>
+          <a:p>
+            <a:pPr algn="l" marL="342900" indent="-342900">
               <a:spcAft>
                 <a:spcPts val="800"/>
               </a:spcAft>
-              <a:buNone/>
+              <a:buSzPct val="100000"/>
+              <a:buChar char="•"/>
             </a:pPr>
             <a:r>
-              <a:rPr lang="en-US" sz="4000" dirty="0">
+              <a:rPr lang="en-US" sz="4000" b="1" dirty="0">
                 <a:solidFill>
                   <a:srgbClr val="111111"/>
                 </a:solidFill>
@@ -15714,7 +15848,64 @@
                 <a:ea typeface="Times New Roman" pitchFamily="34" charset="-122"/>
                 <a:cs typeface="Times New Roman" pitchFamily="34" charset="-120"/>
               </a:rPr>
-              <a:t>People fish in the rivers and at sea, and some dig gold or work in oil fields.</a:t>
+              <a:t>Hunting: </a:t>
+            </a:r>
+            <a:pPr algn="l" marL="342900" indent="-342900">
+              <a:spcAft>
+                <a:spcPts val="800"/>
+              </a:spcAft>
+              <a:buSzPct val="100000"/>
+              <a:buChar char="•"/>
+            </a:pPr>
+            <a:r>
+              <a:rPr lang="en-US" sz="4000" dirty="0">
+                <a:solidFill>
+                  <a:srgbClr val="111111"/>
+                </a:solidFill>
+                <a:latin typeface="Times New Roman" pitchFamily="34" charset="0"/>
+                <a:ea typeface="Times New Roman" pitchFamily="34" charset="-122"/>
+                <a:cs typeface="Times New Roman" pitchFamily="34" charset="-120"/>
+              </a:rPr>
+              <a:t>Animals are hunted for meat, but hunting is controlled.</a:t>
+            </a:r>
+            <a:endParaRPr lang="en-US" sz="4000" dirty="0"/>
+          </a:p>
+          <a:p>
+            <a:pPr algn="l" marL="342900" indent="-342900">
+              <a:spcAft>
+                <a:spcPts val="800"/>
+              </a:spcAft>
+              <a:buSzPct val="100000"/>
+              <a:buChar char="•"/>
+            </a:pPr>
+            <a:r>
+              <a:rPr lang="en-US" sz="4000" b="1" dirty="0">
+                <a:solidFill>
+                  <a:srgbClr val="111111"/>
+                </a:solidFill>
+                <a:latin typeface="Times New Roman" pitchFamily="34" charset="0"/>
+                <a:ea typeface="Times New Roman" pitchFamily="34" charset="-122"/>
+                <a:cs typeface="Times New Roman" pitchFamily="34" charset="-120"/>
+              </a:rPr>
+              <a:t>Gathering: </a:t>
+            </a:r>
+            <a:pPr algn="l" marL="342900" indent="-342900">
+              <a:spcAft>
+                <a:spcPts val="800"/>
+              </a:spcAft>
+              <a:buSzPct val="100000"/>
+              <a:buChar char="•"/>
+            </a:pPr>
+            <a:r>
+              <a:rPr lang="en-US" sz="4000" dirty="0">
+                <a:solidFill>
+                  <a:srgbClr val="111111"/>
+                </a:solidFill>
+                <a:latin typeface="Times New Roman" pitchFamily="34" charset="0"/>
+                <a:ea typeface="Times New Roman" pitchFamily="34" charset="-122"/>
+                <a:cs typeface="Times New Roman" pitchFamily="34" charset="-120"/>
+              </a:rPr>
+              <a:t>Fruits, honey, eru and njansang.</a:t>
             </a:r>
             <a:endParaRPr lang="en-US" sz="4000" dirty="0"/>
           </a:p>
@@ -15826,7 +16017,7 @@
                 <a:ea typeface="Calibri" pitchFamily="34" charset="-122"/>
                 <a:cs typeface="Calibri" pitchFamily="34" charset="-120"/>
               </a:rPr>
-              <a:t>FORMATIVE EVALUATION</a:t>
+              <a:t>BOARD SUMMARY</a:t>
             </a:r>
             <a:endParaRPr lang="en-US" sz="1400" dirty="0"/>
           </a:p>
@@ -15891,7 +16082,7 @@
                 <a:ea typeface="Times New Roman" pitchFamily="34" charset="-122"/>
                 <a:cs typeface="Times New Roman" pitchFamily="34" charset="-120"/>
               </a:rPr>
-              <a:t>Evaluation 1</a:t>
+              <a:t>3. Hunting and Other Activities (continued)</a:t>
             </a:r>
             <a:endParaRPr lang="en-US" sz="3600" dirty="0"/>
           </a:p>
@@ -15918,14 +16109,15 @@
           <a:bodyPr wrap="square" lIns="0" tIns="0" rIns="0" bIns="0" rtlCol="0" anchor="t"/>
           <a:lstStyle/>
           <a:p>
-            <a:pPr algn="l" indent="0" marL="0">
+            <a:pPr algn="l" marL="342900" indent="-342900">
               <a:spcAft>
                 <a:spcPts val="800"/>
               </a:spcAft>
-              <a:buNone/>
+              <a:buSzPct val="100000"/>
+              <a:buChar char="•"/>
             </a:pPr>
             <a:r>
-              <a:rPr lang="en-US" sz="4000" dirty="0">
+              <a:rPr lang="en-US" sz="4000" b="1" dirty="0">
                 <a:solidFill>
                   <a:srgbClr val="111111"/>
                 </a:solidFill>
@@ -15933,7 +16125,64 @@
                 <a:ea typeface="Times New Roman" pitchFamily="34" charset="-122"/>
                 <a:cs typeface="Times New Roman" pitchFamily="34" charset="-120"/>
               </a:rPr>
-              <a:t>What is shifting cultivation?</a:t>
+              <a:t>Fishing: </a:t>
+            </a:r>
+            <a:pPr algn="l" marL="342900" indent="-342900">
+              <a:spcAft>
+                <a:spcPts val="800"/>
+              </a:spcAft>
+              <a:buSzPct val="100000"/>
+              <a:buChar char="•"/>
+            </a:pPr>
+            <a:r>
+              <a:rPr lang="en-US" sz="4000" dirty="0">
+                <a:solidFill>
+                  <a:srgbClr val="111111"/>
+                </a:solidFill>
+                <a:latin typeface="Times New Roman" pitchFamily="34" charset="0"/>
+                <a:ea typeface="Times New Roman" pitchFamily="34" charset="-122"/>
+                <a:cs typeface="Times New Roman" pitchFamily="34" charset="-120"/>
+              </a:rPr>
+              <a:t>In rivers and at sea.</a:t>
+            </a:r>
+            <a:endParaRPr lang="en-US" sz="4000" dirty="0"/>
+          </a:p>
+          <a:p>
+            <a:pPr algn="l" marL="342900" indent="-342900">
+              <a:spcAft>
+                <a:spcPts val="800"/>
+              </a:spcAft>
+              <a:buSzPct val="100000"/>
+              <a:buChar char="•"/>
+            </a:pPr>
+            <a:r>
+              <a:rPr lang="en-US" sz="4000" b="1" dirty="0">
+                <a:solidFill>
+                  <a:srgbClr val="111111"/>
+                </a:solidFill>
+                <a:latin typeface="Times New Roman" pitchFamily="34" charset="0"/>
+                <a:ea typeface="Times New Roman" pitchFamily="34" charset="-122"/>
+                <a:cs typeface="Times New Roman" pitchFamily="34" charset="-120"/>
+              </a:rPr>
+              <a:t>Mining: </a:t>
+            </a:r>
+            <a:pPr algn="l" marL="342900" indent="-342900">
+              <a:spcAft>
+                <a:spcPts val="800"/>
+              </a:spcAft>
+              <a:buSzPct val="100000"/>
+              <a:buChar char="•"/>
+            </a:pPr>
+            <a:r>
+              <a:rPr lang="en-US" sz="4000" dirty="0">
+                <a:solidFill>
+                  <a:srgbClr val="111111"/>
+                </a:solidFill>
+                <a:latin typeface="Times New Roman" pitchFamily="34" charset="0"/>
+                <a:ea typeface="Times New Roman" pitchFamily="34" charset="-122"/>
+                <a:cs typeface="Times New Roman" pitchFamily="34" charset="-120"/>
+              </a:rPr>
+              <a:t>Gold in the East and oil near the coast.</a:t>
             </a:r>
             <a:endParaRPr lang="en-US" sz="4000" dirty="0"/>
           </a:p>
@@ -16110,7 +16359,7 @@
                 <a:ea typeface="Times New Roman" pitchFamily="34" charset="-122"/>
                 <a:cs typeface="Times New Roman" pitchFamily="34" charset="-120"/>
               </a:rPr>
-              <a:t>Expected Answer</a:t>
+              <a:t>Evaluation 1</a:t>
             </a:r>
             <a:endParaRPr lang="en-US" sz="3600" dirty="0"/>
           </a:p>
@@ -16152,7 +16401,7 @@
                 <a:ea typeface="Times New Roman" pitchFamily="34" charset="-122"/>
                 <a:cs typeface="Times New Roman" pitchFamily="34" charset="-120"/>
               </a:rPr>
-              <a:t>Clearing and burning a piece of forest, farming it for a few years and moving to a new place when the soil is poor.</a:t>
+              <a:t>What is shifting cultivation?</a:t>
             </a:r>
             <a:endParaRPr lang="en-US" sz="4000" dirty="0"/>
           </a:p>
@@ -16329,7 +16578,7 @@
                 <a:ea typeface="Times New Roman" pitchFamily="34" charset="-122"/>
                 <a:cs typeface="Times New Roman" pitchFamily="34" charset="-120"/>
               </a:rPr>
-              <a:t>Evaluation 2</a:t>
+              <a:t>Expected Answer</a:t>
             </a:r>
             <a:endParaRPr lang="en-US" sz="3600" dirty="0"/>
           </a:p>
@@ -16371,7 +16620,7 @@
                 <a:ea typeface="Times New Roman" pitchFamily="34" charset="-122"/>
                 <a:cs typeface="Times New Roman" pitchFamily="34" charset="-120"/>
               </a:rPr>
-              <a:t>Name two activities other than farming in the Equatorial region.</a:t>
+              <a:t>Clearing and burning a piece of forest, farming it for a few years and moving to a new place when the soil is poor.</a:t>
             </a:r>
             <a:endParaRPr lang="en-US" sz="4000" dirty="0"/>
           </a:p>
@@ -16548,7 +16797,7 @@
                 <a:ea typeface="Times New Roman" pitchFamily="34" charset="-122"/>
                 <a:cs typeface="Times New Roman" pitchFamily="34" charset="-120"/>
               </a:rPr>
-              <a:t>Expected Answer</a:t>
+              <a:t>Evaluation 2</a:t>
             </a:r>
             <a:endParaRPr lang="en-US" sz="3600" dirty="0"/>
           </a:p>
@@ -16590,7 +16839,7 @@
                 <a:ea typeface="Times New Roman" pitchFamily="34" charset="-122"/>
                 <a:cs typeface="Times New Roman" pitchFamily="34" charset="-120"/>
               </a:rPr>
-              <a:t>Lumbering and hunting (also gathering, fishing, mining).</a:t>
+              <a:t>Name two activities other than farming in the Equatorial region.</a:t>
             </a:r>
             <a:endParaRPr lang="en-US" sz="4000" dirty="0"/>
           </a:p>
@@ -16702,7 +16951,7 @@
                 <a:ea typeface="Calibri" pitchFamily="34" charset="-122"/>
                 <a:cs typeface="Calibri" pitchFamily="34" charset="-120"/>
               </a:rPr>
-              <a:t>REMEDIATION</a:t>
+              <a:t>FORMATIVE EVALUATION</a:t>
             </a:r>
             <a:endParaRPr lang="en-US" sz="1400" dirty="0"/>
           </a:p>
@@ -16767,7 +17016,7 @@
                 <a:ea typeface="Times New Roman" pitchFamily="34" charset="-122"/>
                 <a:cs typeface="Times New Roman" pitchFamily="34" charset="-120"/>
               </a:rPr>
-              <a:t>Remediation</a:t>
+              <a:t>Expected Answer</a:t>
             </a:r>
             <a:endParaRPr lang="en-US" sz="3600" dirty="0"/>
           </a:p>
@@ -16801,7 +17050,7 @@
               <a:buNone/>
             </a:pPr>
             <a:r>
-              <a:rPr lang="en-US" sz="4000" b="1" dirty="0">
+              <a:rPr lang="en-US" sz="4000" dirty="0">
                 <a:solidFill>
                   <a:srgbClr val="111111"/>
                 </a:solidFill>
@@ -16809,51 +17058,7 @@
                 <a:ea typeface="Times New Roman" pitchFamily="34" charset="-122"/>
                 <a:cs typeface="Times New Roman" pitchFamily="34" charset="-120"/>
               </a:rPr>
-              <a:t>Fill in the blanks:</a:t>
-            </a:r>
-            <a:endParaRPr lang="en-US" sz="4000" dirty="0"/>
-          </a:p>
-          <a:p>
-            <a:pPr algn="l" marL="342900" indent="-342900">
-              <a:spcAft>
-                <a:spcPts val="800"/>
-              </a:spcAft>
-              <a:buSzPct val="100000"/>
-              <a:buFont typeface="+mj-lt"/>
-              <a:buAutoNum type="arabicPeriod" startAt="1"/>
-            </a:pPr>
-            <a:r>
-              <a:rPr lang="en-US" sz="4000" dirty="0">
-                <a:solidFill>
-                  <a:srgbClr val="111111"/>
-                </a:solidFill>
-                <a:latin typeface="Times New Roman" pitchFamily="34" charset="0"/>
-                <a:ea typeface="Times New Roman" pitchFamily="34" charset="-122"/>
-                <a:cs typeface="Times New Roman" pitchFamily="34" charset="-120"/>
-              </a:rPr>
-              <a:t>Clearing the forest by cutting and burning is called slash and ______.</a:t>
-            </a:r>
-            <a:endParaRPr lang="en-US" sz="4000" dirty="0"/>
-          </a:p>
-          <a:p>
-            <a:pPr algn="l" marL="342900" indent="-342900">
-              <a:spcAft>
-                <a:spcPts val="800"/>
-              </a:spcAft>
-              <a:buSzPct val="100000"/>
-              <a:buFont typeface="+mj-lt"/>
-              <a:buAutoNum type="arabicPeriod" startAt="1"/>
-            </a:pPr>
-            <a:r>
-              <a:rPr lang="en-US" sz="4000" dirty="0">
-                <a:solidFill>
-                  <a:srgbClr val="111111"/>
-                </a:solidFill>
-                <a:latin typeface="Times New Roman" pitchFamily="34" charset="0"/>
-                <a:ea typeface="Times New Roman" pitchFamily="34" charset="-122"/>
-                <a:cs typeface="Times New Roman" pitchFamily="34" charset="-120"/>
-              </a:rPr>
-              <a:t>A very large farm that grows one cash crop is a ______.</a:t>
+              <a:t>Lumbering and hunting (also gathering, fishing, mining).</a:t>
             </a:r>
             <a:endParaRPr lang="en-US" sz="4000" dirty="0"/>
           </a:p>
@@ -17030,7 +17235,7 @@
                 <a:ea typeface="Times New Roman" pitchFamily="34" charset="-122"/>
                 <a:cs typeface="Times New Roman" pitchFamily="34" charset="-120"/>
               </a:rPr>
-              <a:t>Remediation (continued)</a:t>
+              <a:t>Remediation</a:t>
             </a:r>
             <a:endParaRPr lang="en-US" sz="3600" dirty="0"/>
           </a:p>
@@ -17056,6 +17261,26 @@
         <p:txBody>
           <a:bodyPr wrap="square" lIns="0" tIns="0" rIns="0" bIns="0" rtlCol="0" anchor="t"/>
           <a:lstStyle/>
+          <a:p>
+            <a:pPr algn="l" indent="0" marL="0">
+              <a:spcAft>
+                <a:spcPts val="800"/>
+              </a:spcAft>
+              <a:buNone/>
+            </a:pPr>
+            <a:r>
+              <a:rPr lang="en-US" sz="4000" b="1" dirty="0">
+                <a:solidFill>
+                  <a:srgbClr val="111111"/>
+                </a:solidFill>
+                <a:latin typeface="Times New Roman" pitchFamily="34" charset="0"/>
+                <a:ea typeface="Times New Roman" pitchFamily="34" charset="-122"/>
+                <a:cs typeface="Times New Roman" pitchFamily="34" charset="-120"/>
+              </a:rPr>
+              <a:t>Fill in the blanks:</a:t>
+            </a:r>
+            <a:endParaRPr lang="en-US" sz="4000" dirty="0"/>
+          </a:p>
           <a:p>
             <a:pPr algn="l" marL="342900" indent="-342900">
               <a:spcAft>
@@ -17074,7 +17299,29 @@
                 <a:ea typeface="Times New Roman" pitchFamily="34" charset="-122"/>
                 <a:cs typeface="Times New Roman" pitchFamily="34" charset="-120"/>
               </a:rPr>
-              <a:t>The cutting and selling of trees for timber is ______.</a:t>
+              <a:t>Clearing the forest by cutting and burning is called slash and ______.</a:t>
+            </a:r>
+            <a:endParaRPr lang="en-US" sz="4000" dirty="0"/>
+          </a:p>
+          <a:p>
+            <a:pPr algn="l" marL="342900" indent="-342900">
+              <a:spcAft>
+                <a:spcPts val="800"/>
+              </a:spcAft>
+              <a:buSzPct val="100000"/>
+              <a:buFont typeface="+mj-lt"/>
+              <a:buAutoNum type="arabicPeriod" startAt="1"/>
+            </a:pPr>
+            <a:r>
+              <a:rPr lang="en-US" sz="4000" dirty="0">
+                <a:solidFill>
+                  <a:srgbClr val="111111"/>
+                </a:solidFill>
+                <a:latin typeface="Times New Roman" pitchFamily="34" charset="0"/>
+                <a:ea typeface="Times New Roman" pitchFamily="34" charset="-122"/>
+                <a:cs typeface="Times New Roman" pitchFamily="34" charset="-120"/>
+              </a:rPr>
+              <a:t>A very large farm that grows one cash crop is a ______.</a:t>
             </a:r>
             <a:endParaRPr lang="en-US" sz="4000" dirty="0"/>
           </a:p>
@@ -17186,7 +17433,7 @@
                 <a:ea typeface="Calibri" pitchFamily="34" charset="-122"/>
                 <a:cs typeface="Calibri" pitchFamily="34" charset="-120"/>
               </a:rPr>
-              <a:t>HOMEWORK</a:t>
+              <a:t>REMEDIATION</a:t>
             </a:r>
             <a:endParaRPr lang="en-US" sz="1400" dirty="0"/>
           </a:p>
@@ -17251,7 +17498,7 @@
                 <a:ea typeface="Times New Roman" pitchFamily="34" charset="-122"/>
                 <a:cs typeface="Times New Roman" pitchFamily="34" charset="-120"/>
               </a:rPr>
-              <a:t>Homework</a:t>
+              <a:t>Remediation (continued)</a:t>
             </a:r>
             <a:endParaRPr lang="en-US" sz="3600" dirty="0"/>
           </a:p>
@@ -17278,11 +17525,13 @@
           <a:bodyPr wrap="square" lIns="0" tIns="0" rIns="0" bIns="0" rtlCol="0" anchor="t"/>
           <a:lstStyle/>
           <a:p>
-            <a:pPr algn="l" indent="0" marL="0">
+            <a:pPr algn="l" marL="342900" indent="-342900">
               <a:spcAft>
                 <a:spcPts val="800"/>
               </a:spcAft>
-              <a:buNone/>
+              <a:buSzPct val="100000"/>
+              <a:buFont typeface="+mj-lt"/>
+              <a:buAutoNum type="arabicPeriod" startAt="1"/>
             </a:pPr>
             <a:r>
               <a:rPr lang="en-US" sz="4000" dirty="0">
@@ -17293,7 +17542,7 @@
                 <a:ea typeface="Times New Roman" pitchFamily="34" charset="-122"/>
                 <a:cs typeface="Times New Roman" pitchFamily="34" charset="-120"/>
               </a:rPr>
-              <a:t>Write two problems that forestry, farming or hunting cause to the forest, its animals or its rivers.</a:t>
+              <a:t>The cutting and selling of trees for timber is ______.</a:t>
             </a:r>
             <a:endParaRPr lang="en-US" sz="4000" dirty="0"/>
           </a:p>
@@ -17405,7 +17654,7 @@
                 <a:ea typeface="Calibri" pitchFamily="34" charset="-122"/>
                 <a:cs typeface="Calibri" pitchFamily="34" charset="-120"/>
               </a:rPr>
-              <a:t>NEXT LESSON</a:t>
+              <a:t>HOMEWORK</a:t>
             </a:r>
             <a:endParaRPr lang="en-US" sz="1400" dirty="0"/>
           </a:p>
@@ -17470,7 +17719,7 @@
                 <a:ea typeface="Times New Roman" pitchFamily="34" charset="-122"/>
                 <a:cs typeface="Times New Roman" pitchFamily="34" charset="-120"/>
               </a:rPr>
-              <a:t>Next Lesson</a:t>
+              <a:t>Homework</a:t>
             </a:r>
             <a:endParaRPr lang="en-US" sz="3600" dirty="0"/>
           </a:p>
@@ -17494,17 +17743,17 @@
           <a:ln/>
         </p:spPr>
         <p:txBody>
-          <a:bodyPr wrap="square" lIns="0" tIns="0" rIns="0" bIns="0" rtlCol="0" anchor="ctr"/>
-          <a:lstStyle/>
-          <a:p>
-            <a:pPr algn="ctr" indent="0" marL="0">
+          <a:bodyPr wrap="square" lIns="0" tIns="0" rIns="0" bIns="0" rtlCol="0" anchor="t"/>
+          <a:lstStyle/>
+          <a:p>
+            <a:pPr algn="l" indent="0" marL="0">
               <a:spcAft>
                 <a:spcPts val="800"/>
               </a:spcAft>
               <a:buNone/>
             </a:pPr>
             <a:r>
-              <a:rPr lang="en-US" sz="4000" b="1" dirty="0">
+              <a:rPr lang="en-US" sz="4000" dirty="0">
                 <a:solidFill>
                   <a:srgbClr val="111111"/>
                 </a:solidFill>
@@ -17512,27 +17761,7 @@
                 <a:ea typeface="Times New Roman" pitchFamily="34" charset="-122"/>
                 <a:cs typeface="Times New Roman" pitchFamily="34" charset="-120"/>
               </a:rPr>
-              <a:t>Our next lesson will be on:</a:t>
-            </a:r>
-            <a:endParaRPr lang="en-US" sz="4000" dirty="0"/>
-          </a:p>
-          <a:p>
-            <a:pPr algn="ctr" indent="0" marL="0">
-              <a:spcAft>
-                <a:spcPts val="800"/>
-              </a:spcAft>
-              <a:buNone/>
-            </a:pPr>
-            <a:r>
-              <a:rPr lang="en-US" sz="4000" b="1" dirty="0">
-                <a:solidFill>
-                  <a:srgbClr val="990011"/>
-                </a:solidFill>
-                <a:latin typeface="Times New Roman" pitchFamily="34" charset="0"/>
-                <a:ea typeface="Times New Roman" pitchFamily="34" charset="-122"/>
-                <a:cs typeface="Times New Roman" pitchFamily="34" charset="-120"/>
-              </a:rPr>
-              <a:t>Lesson 1 (Part 5): The Equatorial Region: Problems Faced, Problems Caused and Attempted Solutions</a:t>
+              <a:t>Write two problems that forestry, farming or hunting cause to the forest, its animals or its rivers.</a:t>
             </a:r>
             <a:endParaRPr lang="en-US" sz="4000" dirty="0"/>
           </a:p>
@@ -17863,6 +18092,245 @@
                 <a:ea typeface="Calibri" pitchFamily="34" charset="-122"/>
                 <a:cs typeface="Calibri" pitchFamily="34" charset="-120"/>
               </a:rPr>
+              <a:t>NEXT LESSON</a:t>
+            </a:r>
+            <a:endParaRPr lang="en-US" sz="1400" dirty="0"/>
+          </a:p>
+        </p:txBody>
+      </p:sp>
+      <p:pic>
+        <p:nvPicPr>
+          <p:cNvPr id="3" name="Image 0" descr="/home/claude/f4/img/minesec_sheet.png">    </p:cNvPr>
+          <p:cNvPicPr>
+            <a:picLocks noChangeAspect="1"/>
+          </p:cNvPicPr>
+          <p:nvPr/>
+        </p:nvPicPr>
+        <p:blipFill>
+          <a:blip r:embed="rId1"/>
+          <a:stretch>
+            <a:fillRect/>
+          </a:stretch>
+        </p:blipFill>
+        <p:spPr>
+          <a:xfrm>
+            <a:off x="0" y="658368"/>
+            <a:ext cx="5120640" cy="5833872"/>
+          </a:xfrm>
+          <a:prstGeom prst="rect">
+            <a:avLst/>
+          </a:prstGeom>
+        </p:spPr>
+      </p:pic>
+      <p:sp>
+        <p:nvSpPr>
+          <p:cNvPr id="4" name="Text 1"/>
+          <p:cNvSpPr/>
+          <p:nvPr/>
+        </p:nvSpPr>
+        <p:spPr>
+          <a:xfrm>
+            <a:off x="5349240" y="1005840"/>
+            <a:ext cx="6522415" cy="731520"/>
+          </a:xfrm>
+          <a:prstGeom prst="rect">
+            <a:avLst/>
+          </a:prstGeom>
+          <a:noFill/>
+          <a:ln/>
+        </p:spPr>
+        <p:txBody>
+          <a:bodyPr wrap="square" lIns="0" tIns="0" rIns="0" bIns="0" rtlCol="0" anchor="ctr">
+            <a:normAutofit/>
+          </a:bodyPr>
+          <a:lstStyle/>
+          <a:p>
+            <a:pPr algn="ctr" indent="0" marL="0">
+              <a:buNone/>
+            </a:pPr>
+            <a:r>
+              <a:rPr lang="en-US" sz="3600" b="1" dirty="0">
+                <a:solidFill>
+                  <a:srgbClr val="990011"/>
+                </a:solidFill>
+                <a:latin typeface="Times New Roman" pitchFamily="34" charset="0"/>
+                <a:ea typeface="Times New Roman" pitchFamily="34" charset="-122"/>
+                <a:cs typeface="Times New Roman" pitchFamily="34" charset="-120"/>
+              </a:rPr>
+              <a:t>Next Lesson</a:t>
+            </a:r>
+            <a:endParaRPr lang="en-US" sz="3600" dirty="0"/>
+          </a:p>
+        </p:txBody>
+      </p:sp>
+      <p:sp>
+        <p:nvSpPr>
+          <p:cNvPr id="5" name="Text 2"/>
+          <p:cNvSpPr/>
+          <p:nvPr/>
+        </p:nvSpPr>
+        <p:spPr>
+          <a:xfrm>
+            <a:off x="5349240" y="1783080"/>
+            <a:ext cx="6522415" cy="4663440"/>
+          </a:xfrm>
+          <a:prstGeom prst="rect">
+            <a:avLst/>
+          </a:prstGeom>
+          <a:noFill/>
+          <a:ln/>
+        </p:spPr>
+        <p:txBody>
+          <a:bodyPr wrap="square" lIns="0" tIns="0" rIns="0" bIns="0" rtlCol="0" anchor="ctr"/>
+          <a:lstStyle/>
+          <a:p>
+            <a:pPr algn="ctr" indent="0" marL="0">
+              <a:spcAft>
+                <a:spcPts val="800"/>
+              </a:spcAft>
+              <a:buNone/>
+            </a:pPr>
+            <a:r>
+              <a:rPr lang="en-US" sz="4000" b="1" dirty="0">
+                <a:solidFill>
+                  <a:srgbClr val="111111"/>
+                </a:solidFill>
+                <a:latin typeface="Times New Roman" pitchFamily="34" charset="0"/>
+                <a:ea typeface="Times New Roman" pitchFamily="34" charset="-122"/>
+                <a:cs typeface="Times New Roman" pitchFamily="34" charset="-120"/>
+              </a:rPr>
+              <a:t>Our next lesson will be on:</a:t>
+            </a:r>
+            <a:endParaRPr lang="en-US" sz="4000" dirty="0"/>
+          </a:p>
+          <a:p>
+            <a:pPr algn="ctr" indent="0" marL="0">
+              <a:spcAft>
+                <a:spcPts val="800"/>
+              </a:spcAft>
+              <a:buNone/>
+            </a:pPr>
+            <a:r>
+              <a:rPr lang="en-US" sz="4000" b="1" dirty="0">
+                <a:solidFill>
+                  <a:srgbClr val="990011"/>
+                </a:solidFill>
+                <a:latin typeface="Times New Roman" pitchFamily="34" charset="0"/>
+                <a:ea typeface="Times New Roman" pitchFamily="34" charset="-122"/>
+                <a:cs typeface="Times New Roman" pitchFamily="34" charset="-120"/>
+              </a:rPr>
+              <a:t>Lesson 1 (Part 5): The Equatorial Region: Problems Faced, Problems Caused and Attempted Solutions</a:t>
+            </a:r>
+            <a:endParaRPr lang="en-US" sz="4000" dirty="0"/>
+          </a:p>
+        </p:txBody>
+      </p:sp>
+      <p:sp>
+        <p:nvSpPr>
+          <p:cNvPr id="25" name="Slide Number Placeholder 0"/>
+          <p:cNvSpPr>
+            <a:spLocks noGrp="1"/>
+          </p:cNvSpPr>
+          <p:nvPr>
+            <p:ph type="sldNum" sz="quarter" idx="4294967295"/>
+          </p:nvPr>
+        </p:nvSpPr>
+        <p:spPr>
+          <a:xfrm>
+            <a:off x="27432" y="91440"/>
+            <a:ext cx="585216" cy="475488"/>
+          </a:xfrm>
+          <a:prstGeom prst="rect">
+            <a:avLst/>
+          </a:prstGeom>
+          <a:extLst>
+            <a:ext uri="{C572A759-6A51-4108-AA02-DFA0A04FC94B}">
+              <ma14:wrappingTextBoxFlag xmlns:ma14="http://schemas.microsoft.com/office/mac/drawingml/2011/main" val="0"/>
+            </a:ext>
+          </a:extLst>
+        </p:spPr>
+        <p:txBody>
+          <a:bodyPr/>
+          <a:lstStyle>
+            <a:lvl1pPr>
+              <a:defRPr sz="2000">
+                <a:solidFill>
+                  <a:srgbClr val="FFFFFF"/>
+                </a:solidFill>
+                <a:latin typeface="Calibri"/>
+                <a:ea typeface="Calibri"/>
+                <a:cs typeface="Calibri"/>
+              </a:defRPr>
+            </a:lvl1pPr>
+          </a:lstStyle>
+          <a:p>
+            <a:pPr algn="ctr"/>
+            <a:fld id="{F7021451-1387-4CA6-816F-3879F97B5CBC}" type="slidenum">
+              <a:rPr b="1" lang="en-US"/>
+              <a:t>50</a:t>
+            </a:fld>
+            <a:endParaRPr lang="en-US"/>
+          </a:p>
+        </p:txBody>
+      </p:sp>
+    </p:spTree>
+  </p:cSld>
+  <p:clrMapOvr>
+    <a:masterClrMapping/>
+  </p:clrMapOvr>
+</p:sld>
+</file>
+
+<file path=ppt/slides/slide51.xml><?xml version="1.0" encoding="utf-8"?>
+<p:sld xmlns:a="http://schemas.openxmlformats.org/drawingml/2006/main" xmlns:r="http://schemas.openxmlformats.org/officeDocument/2006/relationships" xmlns:p="http://schemas.openxmlformats.org/presentationml/2006/main">
+  <p:cSld name="Slide 51">
+    <p:spTree>
+      <p:nvGrpSpPr>
+        <p:cNvPr id="1" name=""/>
+        <p:cNvGrpSpPr/>
+        <p:nvPr/>
+      </p:nvGrpSpPr>
+      <p:grpSpPr>
+        <a:xfrm>
+          <a:off x="0" y="0"/>
+          <a:ext cx="0" cy="0"/>
+          <a:chOff x="0" y="0"/>
+          <a:chExt cx="0" cy="0"/>
+        </a:xfrm>
+      </p:grpSpPr>
+      <p:sp>
+        <p:nvSpPr>
+          <p:cNvPr id="2" name="Text 0"/>
+          <p:cNvSpPr/>
+          <p:nvPr/>
+        </p:nvSpPr>
+        <p:spPr>
+          <a:xfrm>
+            <a:off x="457200" y="713232"/>
+            <a:ext cx="11368735" cy="274320"/>
+          </a:xfrm>
+          <a:prstGeom prst="rect">
+            <a:avLst/>
+          </a:prstGeom>
+          <a:noFill/>
+          <a:ln/>
+        </p:spPr>
+        <p:txBody>
+          <a:bodyPr wrap="square" lIns="0" tIns="0" rIns="0" bIns="0" rtlCol="0" anchor="ctr"/>
+          <a:lstStyle/>
+          <a:p>
+            <a:pPr algn="r" indent="0" marL="0">
+              <a:buNone/>
+            </a:pPr>
+            <a:r>
+              <a:rPr lang="en-US" sz="1400" b="1" dirty="0">
+                <a:solidFill>
+                  <a:srgbClr val="1C3F6E"/>
+                </a:solidFill>
+                <a:latin typeface="Calibri" pitchFamily="34" charset="0"/>
+                <a:ea typeface="Calibri" pitchFamily="34" charset="-122"/>
+                <a:cs typeface="Calibri" pitchFamily="34" charset="-120"/>
+              </a:rPr>
               <a:t>BILINGUAL GAME</a:t>
             </a:r>
             <a:endParaRPr lang="en-US" sz="1400" dirty="0"/>
@@ -17910,7 +18378,7 @@
       </p:sp>
       <p:graphicFrame>
         <p:nvGraphicFramePr>
-          <p:cNvPr id="51" name="Table 0"/>
+          <p:cNvPr id="52" name="Table 0"/>
           <p:cNvGraphicFramePr>
             <a:graphicFrameLocks noGrp="1"/>
           </p:cNvGraphicFramePr>
@@ -18946,7 +19414,7 @@
             <a:pPr algn="ctr"/>
             <a:fld id="{F7021451-1387-4CA6-816F-3879F97B5CBC}" type="slidenum">
               <a:rPr b="1" lang="en-US"/>
-              <a:t>50</a:t>
+              <a:t>51</a:t>
             </a:fld>
             <a:endParaRPr lang="en-US"/>
           </a:p>
@@ -18960,9 +19428,9 @@
 </p:sld>
 </file>
 
-<file path=ppt/slides/slide51.xml><?xml version="1.0" encoding="utf-8"?>
+<file path=ppt/slides/slide52.xml><?xml version="1.0" encoding="utf-8"?>
 <p:sld xmlns:a="http://schemas.openxmlformats.org/drawingml/2006/main" xmlns:r="http://schemas.openxmlformats.org/officeDocument/2006/relationships" xmlns:p="http://schemas.openxmlformats.org/presentationml/2006/main">
-  <p:cSld name="Slide 51">
+  <p:cSld name="Slide 52">
     <p:spTree>
       <p:nvGrpSpPr>
         <p:cNvPr id="1" name=""/>
@@ -19057,7 +19525,7 @@
       </p:sp>
       <p:graphicFrame>
         <p:nvGraphicFramePr>
-          <p:cNvPr id="52" name="Table 0"/>
+          <p:cNvPr id="53" name="Table 0"/>
           <p:cNvGraphicFramePr>
             <a:graphicFrameLocks noGrp="1"/>
           </p:cNvGraphicFramePr>
@@ -19679,7 +20147,7 @@
             <a:pPr algn="ctr"/>
             <a:fld id="{F7021451-1387-4CA6-816F-3879F97B5CBC}" type="slidenum">
               <a:rPr b="1" lang="en-US"/>
-              <a:t>51</a:t>
+              <a:t>52</a:t>
             </a:fld>
             <a:endParaRPr lang="en-US"/>
           </a:p>
@@ -19693,9 +20161,9 @@
 </p:sld>
 </file>
 
-<file path=ppt/slides/slide52.xml><?xml version="1.0" encoding="utf-8"?>
+<file path=ppt/slides/slide53.xml><?xml version="1.0" encoding="utf-8"?>
 <p:sld xmlns:a="http://schemas.openxmlformats.org/drawingml/2006/main" xmlns:r="http://schemas.openxmlformats.org/officeDocument/2006/relationships" xmlns:p="http://schemas.openxmlformats.org/presentationml/2006/main">
-  <p:cSld name="Slide 52">
+  <p:cSld name="Slide 53">
     <p:spTree>
       <p:nvGrpSpPr>
         <p:cNvPr id="1" name=""/>
@@ -19790,7 +20258,7 @@
       </p:sp>
       <p:graphicFrame>
         <p:nvGraphicFramePr>
-          <p:cNvPr id="53" name="Table 0"/>
+          <p:cNvPr id="54" name="Table 0"/>
           <p:cNvGraphicFramePr>
             <a:graphicFrameLocks noGrp="1"/>
           </p:cNvGraphicFramePr>
@@ -19900,7 +20368,7 @@
                           <a:ea typeface="Calibri" pitchFamily="34" charset="-122"/>
                           <a:cs typeface="Calibri" pitchFamily="34" charset="-120"/>
                         </a:rPr>
-                        <a:t>DEFINITIONS; Farming; Forestry and Lumbering; Hunting, Gathering and Other Activities.</a:t>
+                        <a:t>DEFINITIONS; Farming; Forestry and Lumbering; Hunting and Other Activities.</a:t>
                       </a:r>
                       <a:endParaRPr lang="en-US" sz="1600" dirty="0">
                         <a:latin typeface="Calibri" charset="0"/>
@@ -20550,352 +21018,6 @@
             <a:pPr algn="ctr"/>
             <a:fld id="{F7021451-1387-4CA6-816F-3879F97B5CBC}" type="slidenum">
               <a:rPr b="1" lang="en-US"/>
-              <a:t>52</a:t>
-            </a:fld>
-            <a:endParaRPr lang="en-US"/>
-          </a:p>
-        </p:txBody>
-      </p:sp>
-    </p:spTree>
-  </p:cSld>
-  <p:clrMapOvr>
-    <a:masterClrMapping/>
-  </p:clrMapOvr>
-</p:sld>
-</file>
-
-<file path=ppt/slides/slide53.xml><?xml version="1.0" encoding="utf-8"?>
-<p:sld xmlns:a="http://schemas.openxmlformats.org/drawingml/2006/main" xmlns:r="http://schemas.openxmlformats.org/officeDocument/2006/relationships" xmlns:p="http://schemas.openxmlformats.org/presentationml/2006/main">
-  <p:cSld name="Slide 53">
-    <p:spTree>
-      <p:nvGrpSpPr>
-        <p:cNvPr id="1" name=""/>
-        <p:cNvGrpSpPr/>
-        <p:nvPr/>
-      </p:nvGrpSpPr>
-      <p:grpSpPr>
-        <a:xfrm>
-          <a:off x="0" y="0"/>
-          <a:ext cx="0" cy="0"/>
-          <a:chOff x="0" y="0"/>
-          <a:chExt cx="0" cy="0"/>
-        </a:xfrm>
-      </p:grpSpPr>
-      <p:sp>
-        <p:nvSpPr>
-          <p:cNvPr id="2" name="Text 0"/>
-          <p:cNvSpPr/>
-          <p:nvPr/>
-        </p:nvSpPr>
-        <p:spPr>
-          <a:xfrm>
-            <a:off x="457200" y="713232"/>
-            <a:ext cx="11368735" cy="274320"/>
-          </a:xfrm>
-          <a:prstGeom prst="rect">
-            <a:avLst/>
-          </a:prstGeom>
-          <a:noFill/>
-          <a:ln/>
-        </p:spPr>
-        <p:txBody>
-          <a:bodyPr wrap="square" lIns="0" tIns="0" rIns="0" bIns="0" rtlCol="0" anchor="ctr"/>
-          <a:lstStyle/>
-          <a:p>
-            <a:pPr algn="r" indent="0" marL="0">
-              <a:buNone/>
-            </a:pPr>
-            <a:r>
-              <a:rPr lang="en-US" sz="1400" b="1" dirty="0">
-                <a:solidFill>
-                  <a:srgbClr val="1C3F6E"/>
-                </a:solidFill>
-                <a:latin typeface="Calibri" pitchFamily="34" charset="0"/>
-                <a:ea typeface="Calibri" pitchFamily="34" charset="-122"/>
-                <a:cs typeface="Calibri" pitchFamily="34" charset="-120"/>
-              </a:rPr>
-              <a:t>TEACHER'S NOTE</a:t>
-            </a:r>
-            <a:endParaRPr lang="en-US" sz="1400" dirty="0"/>
-          </a:p>
-        </p:txBody>
-      </p:sp>
-      <p:pic>
-        <p:nvPicPr>
-          <p:cNvPr id="3" name="Image 0" descr="/home/claude/f4/img/minesec_sheet.png">    </p:cNvPr>
-          <p:cNvPicPr>
-            <a:picLocks noChangeAspect="1"/>
-          </p:cNvPicPr>
-          <p:nvPr/>
-        </p:nvPicPr>
-        <p:blipFill>
-          <a:blip r:embed="rId1"/>
-          <a:stretch>
-            <a:fillRect/>
-          </a:stretch>
-        </p:blipFill>
-        <p:spPr>
-          <a:xfrm>
-            <a:off x="0" y="658368"/>
-            <a:ext cx="1463040" cy="5833872"/>
-          </a:xfrm>
-          <a:prstGeom prst="rect">
-            <a:avLst/>
-          </a:prstGeom>
-        </p:spPr>
-      </p:pic>
-      <p:sp>
-        <p:nvSpPr>
-          <p:cNvPr id="4" name="Text 1"/>
-          <p:cNvSpPr/>
-          <p:nvPr/>
-        </p:nvSpPr>
-        <p:spPr>
-          <a:xfrm>
-            <a:off x="1691640" y="1005840"/>
-            <a:ext cx="10180015" cy="731520"/>
-          </a:xfrm>
-          <a:prstGeom prst="rect">
-            <a:avLst/>
-          </a:prstGeom>
-          <a:noFill/>
-          <a:ln/>
-        </p:spPr>
-        <p:txBody>
-          <a:bodyPr wrap="square" lIns="0" tIns="0" rIns="0" bIns="0" rtlCol="0" anchor="ctr">
-            <a:normAutofit/>
-          </a:bodyPr>
-          <a:lstStyle/>
-          <a:p>
-            <a:pPr algn="ctr" indent="0" marL="0">
-              <a:buNone/>
-            </a:pPr>
-            <a:r>
-              <a:rPr lang="en-US" sz="3600" b="1" dirty="0">
-                <a:solidFill>
-                  <a:srgbClr val="990011"/>
-                </a:solidFill>
-                <a:latin typeface="Times New Roman" pitchFamily="34" charset="0"/>
-                <a:ea typeface="Times New Roman" pitchFamily="34" charset="-122"/>
-                <a:cs typeface="Times New Roman" pitchFamily="34" charset="-120"/>
-              </a:rPr>
-              <a:t>Teacher's Note</a:t>
-            </a:r>
-            <a:endParaRPr lang="en-US" sz="3600" dirty="0"/>
-          </a:p>
-        </p:txBody>
-      </p:sp>
-      <p:sp>
-        <p:nvSpPr>
-          <p:cNvPr id="5" name="Text 2"/>
-          <p:cNvSpPr/>
-          <p:nvPr/>
-        </p:nvSpPr>
-        <p:spPr>
-          <a:xfrm>
-            <a:off x="1691640" y="1783080"/>
-            <a:ext cx="10180015" cy="4663440"/>
-          </a:xfrm>
-          <a:prstGeom prst="rect">
-            <a:avLst/>
-          </a:prstGeom>
-          <a:noFill/>
-          <a:ln/>
-        </p:spPr>
-        <p:txBody>
-          <a:bodyPr wrap="square" lIns="0" tIns="0" rIns="0" bIns="0" rtlCol="0" anchor="t"/>
-          <a:lstStyle/>
-          <a:p>
-            <a:pPr algn="l" marL="342900" indent="-342900">
-              <a:spcAft>
-                <a:spcPts val="800"/>
-              </a:spcAft>
-              <a:buSzPct val="100000"/>
-              <a:buChar char="•"/>
-            </a:pPr>
-            <a:r>
-              <a:rPr lang="en-US" sz="2000" dirty="0">
-                <a:solidFill>
-                  <a:srgbClr val="111111"/>
-                </a:solidFill>
-                <a:latin typeface="Calibri" pitchFamily="34" charset="0"/>
-                <a:ea typeface="Calibri" pitchFamily="34" charset="-122"/>
-                <a:cs typeface="Calibri" pitchFamily="34" charset="-120"/>
-              </a:rPr>
-              <a:t>Timing: Homework correction, plan, objectives 8 min | Recall, situation, action 10 min | 5 activities 30 min | Board summary (copying) 30 min | Evaluation, remediation 10 min | Homework, next lesson 5 min | Logbook 7 min</a:t>
-            </a:r>
-            <a:endParaRPr lang="en-US" sz="2000" dirty="0"/>
-          </a:p>
-          <a:p>
-            <a:pPr algn="l" marL="342900" indent="-342900">
-              <a:spcAft>
-                <a:spcPts val="800"/>
-              </a:spcAft>
-              <a:buSzPct val="100000"/>
-              <a:buChar char="•"/>
-            </a:pPr>
-            <a:r>
-              <a:rPr lang="en-US" sz="2000" dirty="0">
-                <a:solidFill>
-                  <a:srgbClr val="111111"/>
-                </a:solidFill>
-                <a:latin typeface="Calibri" pitchFamily="34" charset="0"/>
-                <a:ea typeface="Calibri" pitchFamily="34" charset="-122"/>
-                <a:cs typeface="Calibri" pitchFamily="34" charset="-120"/>
-              </a:rPr>
-              <a:t>The Baka of the East and South Regions live mainly from hunting and gathering; hunting is regulated by the Forestry Law of 1994 (protected species, hunting seasons).</a:t>
-            </a:r>
-            <a:endParaRPr lang="en-US" sz="2000" dirty="0"/>
-          </a:p>
-          <a:p>
-            <a:pPr algn="l" marL="342900" indent="-342900">
-              <a:spcAft>
-                <a:spcPts val="800"/>
-              </a:spcAft>
-              <a:buSzPct val="100000"/>
-              <a:buChar char="•"/>
-            </a:pPr>
-            <a:r>
-              <a:rPr lang="en-US" sz="2000" dirty="0">
-                <a:solidFill>
-                  <a:srgbClr val="111111"/>
-                </a:solidFill>
-                <a:latin typeface="Calibri" pitchFamily="34" charset="0"/>
-                <a:ea typeface="Calibri" pitchFamily="34" charset="-122"/>
-                <a:cs typeface="Calibri" pitchFamily="34" charset="-120"/>
-              </a:rPr>
-              <a:t>Without the projector (Activity 1): describe how a farm is cleared in the forest.</a:t>
-            </a:r>
-            <a:endParaRPr lang="en-US" sz="2000" dirty="0"/>
-          </a:p>
-          <a:p>
-            <a:pPr algn="l" marL="342900" indent="-342900">
-              <a:spcAft>
-                <a:spcPts val="800"/>
-              </a:spcAft>
-              <a:buSzPct val="100000"/>
-              <a:buChar char="•"/>
-            </a:pPr>
-            <a:r>
-              <a:rPr lang="en-US" sz="2000" dirty="0">
-                <a:solidFill>
-                  <a:srgbClr val="111111"/>
-                </a:solidFill>
-                <a:latin typeface="Calibri" pitchFamily="34" charset="0"/>
-                <a:ea typeface="Calibri" pitchFamily="34" charset="-122"/>
-                <a:cs typeface="Calibri" pitchFamily="34" charset="-120"/>
-              </a:rPr>
-              <a:t>Without the projector (Activity 2): list foods from the south sold in Garoua.</a:t>
-            </a:r>
-            <a:endParaRPr lang="en-US" sz="2000" dirty="0"/>
-          </a:p>
-          <a:p>
-            <a:pPr algn="l" marL="342900" indent="-342900">
-              <a:spcAft>
-                <a:spcPts val="800"/>
-              </a:spcAft>
-              <a:buSzPct val="100000"/>
-              <a:buChar char="•"/>
-            </a:pPr>
-            <a:r>
-              <a:rPr lang="en-US" sz="2000" dirty="0">
-                <a:solidFill>
-                  <a:srgbClr val="111111"/>
-                </a:solidFill>
-                <a:latin typeface="Calibri" pitchFamily="34" charset="0"/>
-                <a:ea typeface="Calibri" pitchFamily="34" charset="-122"/>
-                <a:cs typeface="Calibri" pitchFamily="34" charset="-120"/>
-              </a:rPr>
-              <a:t>Without the projector (Activity 3): name products made from palm oil.</a:t>
-            </a:r>
-            <a:endParaRPr lang="en-US" sz="2000" dirty="0"/>
-          </a:p>
-          <a:p>
-            <a:pPr algn="l" marL="342900" indent="-342900">
-              <a:spcAft>
-                <a:spcPts val="800"/>
-              </a:spcAft>
-              <a:buSzPct val="100000"/>
-              <a:buChar char="•"/>
-            </a:pPr>
-            <a:r>
-              <a:rPr lang="en-US" sz="2000" dirty="0">
-                <a:solidFill>
-                  <a:srgbClr val="111111"/>
-                </a:solidFill>
-                <a:latin typeface="Calibri" pitchFamily="34" charset="0"/>
-                <a:ea typeface="Calibri" pitchFamily="34" charset="-122"/>
-                <a:cs typeface="Calibri" pitchFamily="34" charset="-120"/>
-              </a:rPr>
-              <a:t>Without the projector (Activity 4): ask who has seen cocoa pods.</a:t>
-            </a:r>
-            <a:endParaRPr lang="en-US" sz="2000" dirty="0"/>
-          </a:p>
-          <a:p>
-            <a:pPr algn="l" marL="342900" indent="-342900">
-              <a:spcAft>
-                <a:spcPts val="800"/>
-              </a:spcAft>
-              <a:buSzPct val="100000"/>
-              <a:buChar char="•"/>
-            </a:pPr>
-            <a:r>
-              <a:rPr lang="en-US" sz="2000" dirty="0">
-                <a:solidFill>
-                  <a:srgbClr val="111111"/>
-                </a:solidFill>
-                <a:latin typeface="Calibri" pitchFamily="34" charset="0"/>
-                <a:ea typeface="Calibri" pitchFamily="34" charset="-122"/>
-                <a:cs typeface="Calibri" pitchFamily="34" charset="-120"/>
-              </a:rPr>
-              <a:t>Without the projector (Activity 5): write the stages on the board.</a:t>
-            </a:r>
-            <a:endParaRPr lang="en-US" sz="2000" dirty="0"/>
-          </a:p>
-        </p:txBody>
-      </p:sp>
-      <p:sp>
-        <p:nvSpPr>
-          <p:cNvPr id="25" name="Slide Number Placeholder 0"/>
-          <p:cNvSpPr>
-            <a:spLocks noGrp="1"/>
-          </p:cNvSpPr>
-          <p:nvPr>
-            <p:ph type="sldNum" sz="quarter" idx="4294967295"/>
-          </p:nvPr>
-        </p:nvSpPr>
-        <p:spPr>
-          <a:xfrm>
-            <a:off x="27432" y="91440"/>
-            <a:ext cx="585216" cy="475488"/>
-          </a:xfrm>
-          <a:prstGeom prst="rect">
-            <a:avLst/>
-          </a:prstGeom>
-          <a:extLst>
-            <a:ext uri="{C572A759-6A51-4108-AA02-DFA0A04FC94B}">
-              <ma14:wrappingTextBoxFlag xmlns:ma14="http://schemas.microsoft.com/office/mac/drawingml/2011/main" val="0"/>
-            </a:ext>
-          </a:extLst>
-        </p:spPr>
-        <p:txBody>
-          <a:bodyPr/>
-          <a:lstStyle>
-            <a:lvl1pPr>
-              <a:defRPr sz="2000">
-                <a:solidFill>
-                  <a:srgbClr val="FFFFFF"/>
-                </a:solidFill>
-                <a:latin typeface="Calibri"/>
-                <a:ea typeface="Calibri"/>
-                <a:cs typeface="Calibri"/>
-              </a:defRPr>
-            </a:lvl1pPr>
-          </a:lstStyle>
-          <a:p>
-            <a:pPr algn="ctr"/>
-            <a:fld id="{F7021451-1387-4CA6-816F-3879F97B5CBC}" type="slidenum">
-              <a:rPr b="1" lang="en-US"/>
               <a:t>53</a:t>
             </a:fld>
             <a:endParaRPr lang="en-US"/>
@@ -20960,7 +21082,7 @@
                 <a:ea typeface="Calibri" pitchFamily="34" charset="-122"/>
                 <a:cs typeface="Calibri" pitchFamily="34" charset="-120"/>
               </a:rPr>
-              <a:t>REFERENCES</a:t>
+              <a:t>TEACHER'S NOTE</a:t>
             </a:r>
             <a:endParaRPr lang="en-US" sz="1400" dirty="0"/>
           </a:p>
@@ -21025,7 +21147,7 @@
                 <a:ea typeface="Times New Roman" pitchFamily="34" charset="-122"/>
                 <a:cs typeface="Times New Roman" pitchFamily="34" charset="-120"/>
               </a:rPr>
-              <a:t>References</a:t>
+              <a:t>Teacher's Note</a:t>
             </a:r>
             <a:endParaRPr lang="en-US" sz="3600" dirty="0"/>
           </a:p>
@@ -21060,7 +21182,7 @@
               <a:buChar char="•"/>
             </a:pPr>
             <a:r>
-              <a:rPr lang="en-US" sz="1800" dirty="0">
+              <a:rPr lang="en-US" sz="2000" dirty="0">
                 <a:solidFill>
                   <a:srgbClr val="111111"/>
                 </a:solidFill>
@@ -21068,9 +21190,9 @@
                 <a:ea typeface="Calibri" pitchFamily="34" charset="-122"/>
                 <a:cs typeface="Calibri" pitchFamily="34" charset="-120"/>
               </a:rPr>
-              <a:t>Harmonised Progression Sheet, Economic Geography (5051), Form 2 — week 5.</a:t>
-            </a:r>
-            <a:endParaRPr lang="en-US" sz="1800" dirty="0"/>
+              <a:t>Timing: Homework correction, plan, objectives 8 min | Recall, situation, action 10 min | 5 activities 30 min | Board summary (copying) 30 min | Evaluation, remediation 10 min | Homework, next lesson 5 min | Logbook 7 min</a:t>
+            </a:r>
+            <a:endParaRPr lang="en-US" sz="2000" dirty="0"/>
           </a:p>
           <a:p>
             <a:pPr algn="l" marL="342900" indent="-342900">
@@ -21081,7 +21203,7 @@
               <a:buChar char="•"/>
             </a:pPr>
             <a:r>
-              <a:rPr lang="en-US" sz="1800" dirty="0">
+              <a:rPr lang="en-US" sz="2000" dirty="0">
                 <a:solidFill>
                   <a:srgbClr val="111111"/>
                 </a:solidFill>
@@ -21089,9 +21211,9 @@
                 <a:ea typeface="Calibri" pitchFamily="34" charset="-122"/>
                 <a:cs typeface="Calibri" pitchFamily="34" charset="-120"/>
               </a:rPr>
-              <a:t>Climate data for Yaoundé: long-term averages (approximate).</a:t>
-            </a:r>
-            <a:endParaRPr lang="en-US" sz="1800" dirty="0"/>
+              <a:t>The Baka of the East and South Regions live mainly from hunting and gathering; hunting is regulated by the Forestry Law of 1994 (protected species, hunting seasons).</a:t>
+            </a:r>
+            <a:endParaRPr lang="en-US" sz="2000" dirty="0"/>
           </a:p>
           <a:p>
             <a:pPr algn="l" marL="342900" indent="-342900">
@@ -21102,7 +21224,7 @@
               <a:buChar char="•"/>
             </a:pPr>
             <a:r>
-              <a:rPr lang="en-US" sz="1800" dirty="0">
+              <a:rPr lang="en-US" sz="2000" dirty="0">
                 <a:solidFill>
                   <a:srgbClr val="111111"/>
                 </a:solidFill>
@@ -21110,9 +21232,9 @@
                 <a:ea typeface="Calibri" pitchFamily="34" charset="-122"/>
                 <a:cs typeface="Calibri" pitchFamily="34" charset="-120"/>
               </a:rPr>
-              <a:t>Photo, Activity 1: “Slash and burn agriculture in the Amazon” by Matt-Zimmerman, CC BY 2.0, via Flickr (https://www.flickr.com/photos/16725630@N00/1524189000)</a:t>
-            </a:r>
-            <a:endParaRPr lang="en-US" sz="1800" dirty="0"/>
+              <a:t>Without the projector (Activity 1): describe slash and burn.</a:t>
+            </a:r>
+            <a:endParaRPr lang="en-US" sz="2000" dirty="0"/>
           </a:p>
           <a:p>
             <a:pPr algn="l" marL="342900" indent="-342900">
@@ -21123,7 +21245,7 @@
               <a:buChar char="•"/>
             </a:pPr>
             <a:r>
-              <a:rPr lang="en-US" sz="1800" dirty="0">
+              <a:rPr lang="en-US" sz="2000" dirty="0">
                 <a:solidFill>
                   <a:srgbClr val="111111"/>
                 </a:solidFill>
@@ -21131,9 +21253,9 @@
                 <a:ea typeface="Calibri" pitchFamily="34" charset="-122"/>
                 <a:cs typeface="Calibri" pitchFamily="34" charset="-120"/>
               </a:rPr>
-              <a:t>Photo, Activity 2: “Workshop in Lushoto, Tanzania” by CGIAR Climate, CC BY-NC-SA 2.0, via Flickr (https://www.flickr.com/photos/55227776@N04/8551480688)</a:t>
-            </a:r>
-            <a:endParaRPr lang="en-US" sz="1800" dirty="0"/>
+              <a:t>Without the projector (Activity 2): list food crops sold in Garoua.</a:t>
+            </a:r>
+            <a:endParaRPr lang="en-US" sz="2000" dirty="0"/>
           </a:p>
           <a:p>
             <a:pPr algn="l" marL="342900" indent="-342900">
@@ -21144,7 +21266,7 @@
               <a:buChar char="•"/>
             </a:pPr>
             <a:r>
-              <a:rPr lang="en-US" sz="1800" dirty="0">
+              <a:rPr lang="en-US" sz="2000" dirty="0">
                 <a:solidFill>
                   <a:srgbClr val="111111"/>
                 </a:solidFill>
@@ -21152,9 +21274,9 @@
                 <a:ea typeface="Calibri" pitchFamily="34" charset="-122"/>
                 <a:cs typeface="Calibri" pitchFamily="34" charset="-120"/>
               </a:rPr>
-              <a:t>Photo, Activity 3: “Aerial view of oil palm plantation” by CIFOR, CC BY-NC-ND 2.0, via Flickr (https://www.flickr.com/photos/45423546@N07/38802487905)</a:t>
-            </a:r>
-            <a:endParaRPr lang="en-US" sz="1800" dirty="0"/>
+              <a:t>Without the projector (Activity 3): name the CDC.</a:t>
+            </a:r>
+            <a:endParaRPr lang="en-US" sz="2000" dirty="0"/>
           </a:p>
           <a:p>
             <a:pPr algn="l" marL="342900" indent="-342900">
@@ -21165,7 +21287,7 @@
               <a:buChar char="•"/>
             </a:pPr>
             <a:r>
-              <a:rPr lang="en-US" sz="1800" dirty="0">
+              <a:rPr lang="en-US" sz="2000" dirty="0">
                 <a:solidFill>
                   <a:srgbClr val="111111"/>
                 </a:solidFill>
@@ -21173,9 +21295,9 @@
                 <a:ea typeface="Calibri" pitchFamily="34" charset="-122"/>
                 <a:cs typeface="Calibri" pitchFamily="34" charset="-120"/>
               </a:rPr>
-              <a:t>Photo, Activity 4: “Farmer sun drying cocoa beans” by IITA Image Library, CC BY-NC 2.0, via Flickr (https://www.flickr.com/photos/45796762@N03/4598613756)</a:t>
-            </a:r>
-            <a:endParaRPr lang="en-US" sz="1800" dirty="0"/>
+              <a:t>Without the projector (Activity 4): show a plank.</a:t>
+            </a:r>
+            <a:endParaRPr lang="en-US" sz="2000" dirty="0"/>
           </a:p>
           <a:p>
             <a:pPr algn="l" marL="342900" indent="-342900">
@@ -21186,7 +21308,7 @@
               <a:buChar char="•"/>
             </a:pPr>
             <a:r>
-              <a:rPr lang="en-US" sz="1800" dirty="0">
+              <a:rPr lang="en-US" sz="2000" dirty="0">
                 <a:solidFill>
                   <a:srgbClr val="111111"/>
                 </a:solidFill>
@@ -21194,10 +21316,209 @@
                 <a:ea typeface="Calibri" pitchFamily="34" charset="-122"/>
                 <a:cs typeface="Calibri" pitchFamily="34" charset="-120"/>
               </a:rPr>
-              <a:t>Photo, Activity 5: “CBCF Project, Yogyakarta” by CIFOR, CC BY-NC-ND 2.0, via Flickr (https://www.flickr.com/photos/45423546@N07/35977173724)</a:t>
-            </a:r>
-            <a:endParaRPr lang="en-US" sz="1800" dirty="0"/>
-          </a:p>
+              <a:t>Without the projector (Activity 5): name rare animals.</a:t>
+            </a:r>
+            <a:endParaRPr lang="en-US" sz="2000" dirty="0"/>
+          </a:p>
+        </p:txBody>
+      </p:sp>
+      <p:sp>
+        <p:nvSpPr>
+          <p:cNvPr id="25" name="Slide Number Placeholder 0"/>
+          <p:cNvSpPr>
+            <a:spLocks noGrp="1"/>
+          </p:cNvSpPr>
+          <p:nvPr>
+            <p:ph type="sldNum" sz="quarter" idx="4294967295"/>
+          </p:nvPr>
+        </p:nvSpPr>
+        <p:spPr>
+          <a:xfrm>
+            <a:off x="27432" y="91440"/>
+            <a:ext cx="585216" cy="475488"/>
+          </a:xfrm>
+          <a:prstGeom prst="rect">
+            <a:avLst/>
+          </a:prstGeom>
+          <a:extLst>
+            <a:ext uri="{C572A759-6A51-4108-AA02-DFA0A04FC94B}">
+              <ma14:wrappingTextBoxFlag xmlns:ma14="http://schemas.microsoft.com/office/mac/drawingml/2011/main" val="0"/>
+            </a:ext>
+          </a:extLst>
+        </p:spPr>
+        <p:txBody>
+          <a:bodyPr/>
+          <a:lstStyle>
+            <a:lvl1pPr>
+              <a:defRPr sz="2000">
+                <a:solidFill>
+                  <a:srgbClr val="FFFFFF"/>
+                </a:solidFill>
+                <a:latin typeface="Calibri"/>
+                <a:ea typeface="Calibri"/>
+                <a:cs typeface="Calibri"/>
+              </a:defRPr>
+            </a:lvl1pPr>
+          </a:lstStyle>
+          <a:p>
+            <a:pPr algn="ctr"/>
+            <a:fld id="{F7021451-1387-4CA6-816F-3879F97B5CBC}" type="slidenum">
+              <a:rPr b="1" lang="en-US"/>
+              <a:t>54</a:t>
+            </a:fld>
+            <a:endParaRPr lang="en-US"/>
+          </a:p>
+        </p:txBody>
+      </p:sp>
+    </p:spTree>
+  </p:cSld>
+  <p:clrMapOvr>
+    <a:masterClrMapping/>
+  </p:clrMapOvr>
+</p:sld>
+</file>
+
+<file path=ppt/slides/slide55.xml><?xml version="1.0" encoding="utf-8"?>
+<p:sld xmlns:a="http://schemas.openxmlformats.org/drawingml/2006/main" xmlns:r="http://schemas.openxmlformats.org/officeDocument/2006/relationships" xmlns:p="http://schemas.openxmlformats.org/presentationml/2006/main">
+  <p:cSld name="Slide 55">
+    <p:spTree>
+      <p:nvGrpSpPr>
+        <p:cNvPr id="1" name=""/>
+        <p:cNvGrpSpPr/>
+        <p:nvPr/>
+      </p:nvGrpSpPr>
+      <p:grpSpPr>
+        <a:xfrm>
+          <a:off x="0" y="0"/>
+          <a:ext cx="0" cy="0"/>
+          <a:chOff x="0" y="0"/>
+          <a:chExt cx="0" cy="0"/>
+        </a:xfrm>
+      </p:grpSpPr>
+      <p:sp>
+        <p:nvSpPr>
+          <p:cNvPr id="2" name="Text 0"/>
+          <p:cNvSpPr/>
+          <p:nvPr/>
+        </p:nvSpPr>
+        <p:spPr>
+          <a:xfrm>
+            <a:off x="457200" y="713232"/>
+            <a:ext cx="11368735" cy="274320"/>
+          </a:xfrm>
+          <a:prstGeom prst="rect">
+            <a:avLst/>
+          </a:prstGeom>
+          <a:noFill/>
+          <a:ln/>
+        </p:spPr>
+        <p:txBody>
+          <a:bodyPr wrap="square" lIns="0" tIns="0" rIns="0" bIns="0" rtlCol="0" anchor="ctr"/>
+          <a:lstStyle/>
+          <a:p>
+            <a:pPr algn="r" indent="0" marL="0">
+              <a:buNone/>
+            </a:pPr>
+            <a:r>
+              <a:rPr lang="en-US" sz="1400" b="1" dirty="0">
+                <a:solidFill>
+                  <a:srgbClr val="1C3F6E"/>
+                </a:solidFill>
+                <a:latin typeface="Calibri" pitchFamily="34" charset="0"/>
+                <a:ea typeface="Calibri" pitchFamily="34" charset="-122"/>
+                <a:cs typeface="Calibri" pitchFamily="34" charset="-120"/>
+              </a:rPr>
+              <a:t>REFERENCES</a:t>
+            </a:r>
+            <a:endParaRPr lang="en-US" sz="1400" dirty="0"/>
+          </a:p>
+        </p:txBody>
+      </p:sp>
+      <p:pic>
+        <p:nvPicPr>
+          <p:cNvPr id="3" name="Image 0" descr="/home/claude/f4/img/minesec_sheet.png">    </p:cNvPr>
+          <p:cNvPicPr>
+            <a:picLocks noChangeAspect="1"/>
+          </p:cNvPicPr>
+          <p:nvPr/>
+        </p:nvPicPr>
+        <p:blipFill>
+          <a:blip r:embed="rId1"/>
+          <a:stretch>
+            <a:fillRect/>
+          </a:stretch>
+        </p:blipFill>
+        <p:spPr>
+          <a:xfrm>
+            <a:off x="0" y="658368"/>
+            <a:ext cx="2468880" cy="5833872"/>
+          </a:xfrm>
+          <a:prstGeom prst="rect">
+            <a:avLst/>
+          </a:prstGeom>
+        </p:spPr>
+      </p:pic>
+      <p:sp>
+        <p:nvSpPr>
+          <p:cNvPr id="4" name="Text 1"/>
+          <p:cNvSpPr/>
+          <p:nvPr/>
+        </p:nvSpPr>
+        <p:spPr>
+          <a:xfrm>
+            <a:off x="2697480" y="1005840"/>
+            <a:ext cx="9174175" cy="731520"/>
+          </a:xfrm>
+          <a:prstGeom prst="rect">
+            <a:avLst/>
+          </a:prstGeom>
+          <a:noFill/>
+          <a:ln/>
+        </p:spPr>
+        <p:txBody>
+          <a:bodyPr wrap="square" lIns="0" tIns="0" rIns="0" bIns="0" rtlCol="0" anchor="ctr">
+            <a:normAutofit/>
+          </a:bodyPr>
+          <a:lstStyle/>
+          <a:p>
+            <a:pPr algn="ctr" indent="0" marL="0">
+              <a:buNone/>
+            </a:pPr>
+            <a:r>
+              <a:rPr lang="en-US" sz="3600" b="1" dirty="0">
+                <a:solidFill>
+                  <a:srgbClr val="990011"/>
+                </a:solidFill>
+                <a:latin typeface="Times New Roman" pitchFamily="34" charset="0"/>
+                <a:ea typeface="Times New Roman" pitchFamily="34" charset="-122"/>
+                <a:cs typeface="Times New Roman" pitchFamily="34" charset="-120"/>
+              </a:rPr>
+              <a:t>References</a:t>
+            </a:r>
+            <a:endParaRPr lang="en-US" sz="3600" dirty="0"/>
+          </a:p>
+        </p:txBody>
+      </p:sp>
+      <p:sp>
+        <p:nvSpPr>
+          <p:cNvPr id="5" name="Text 2"/>
+          <p:cNvSpPr/>
+          <p:nvPr/>
+        </p:nvSpPr>
+        <p:spPr>
+          <a:xfrm>
+            <a:off x="2697480" y="1783080"/>
+            <a:ext cx="9174175" cy="4663440"/>
+          </a:xfrm>
+          <a:prstGeom prst="rect">
+            <a:avLst/>
+          </a:prstGeom>
+          <a:noFill/>
+          <a:ln/>
+        </p:spPr>
+        <p:txBody>
+          <a:bodyPr wrap="square" lIns="0" tIns="0" rIns="0" bIns="0" rtlCol="0" anchor="t"/>
+          <a:lstStyle/>
           <a:p>
             <a:pPr algn="l" marL="342900" indent="-342900">
               <a:spcAft>
@@ -21215,6 +21536,153 @@
                 <a:ea typeface="Calibri" pitchFamily="34" charset="-122"/>
                 <a:cs typeface="Calibri" pitchFamily="34" charset="-120"/>
               </a:rPr>
+              <a:t>Harmonised Progression Sheet, Economic Geography (5051), Form 2 — week 5.</a:t>
+            </a:r>
+            <a:endParaRPr lang="en-US" sz="1800" dirty="0"/>
+          </a:p>
+          <a:p>
+            <a:pPr algn="l" marL="342900" indent="-342900">
+              <a:spcAft>
+                <a:spcPts val="800"/>
+              </a:spcAft>
+              <a:buSzPct val="100000"/>
+              <a:buChar char="•"/>
+            </a:pPr>
+            <a:r>
+              <a:rPr lang="en-US" sz="1800" dirty="0">
+                <a:solidFill>
+                  <a:srgbClr val="111111"/>
+                </a:solidFill>
+                <a:latin typeface="Calibri" pitchFamily="34" charset="0"/>
+                <a:ea typeface="Calibri" pitchFamily="34" charset="-122"/>
+                <a:cs typeface="Calibri" pitchFamily="34" charset="-120"/>
+              </a:rPr>
+              <a:t>Climate data for Yaoundé: long-term averages (approximate).</a:t>
+            </a:r>
+            <a:endParaRPr lang="en-US" sz="1800" dirty="0"/>
+          </a:p>
+          <a:p>
+            <a:pPr algn="l" marL="342900" indent="-342900">
+              <a:spcAft>
+                <a:spcPts val="800"/>
+              </a:spcAft>
+              <a:buSzPct val="100000"/>
+              <a:buChar char="•"/>
+            </a:pPr>
+            <a:r>
+              <a:rPr lang="en-US" sz="1800" dirty="0">
+                <a:solidFill>
+                  <a:srgbClr val="111111"/>
+                </a:solidFill>
+                <a:latin typeface="Calibri" pitchFamily="34" charset="0"/>
+                <a:ea typeface="Calibri" pitchFamily="34" charset="-122"/>
+                <a:cs typeface="Calibri" pitchFamily="34" charset="-120"/>
+              </a:rPr>
+              <a:t>Photo, Activity 1: “Slash and burn agriculture in the Amazon” by Matt-Zimmerman, CC BY 2.0, via Flickr (https://www.flickr.com/photos/16725630@N00/1524189000)</a:t>
+            </a:r>
+            <a:endParaRPr lang="en-US" sz="1800" dirty="0"/>
+          </a:p>
+          <a:p>
+            <a:pPr algn="l" marL="342900" indent="-342900">
+              <a:spcAft>
+                <a:spcPts val="800"/>
+              </a:spcAft>
+              <a:buSzPct val="100000"/>
+              <a:buChar char="•"/>
+            </a:pPr>
+            <a:r>
+              <a:rPr lang="en-US" sz="1800" dirty="0">
+                <a:solidFill>
+                  <a:srgbClr val="111111"/>
+                </a:solidFill>
+                <a:latin typeface="Calibri" pitchFamily="34" charset="0"/>
+                <a:ea typeface="Calibri" pitchFamily="34" charset="-122"/>
+                <a:cs typeface="Calibri" pitchFamily="34" charset="-120"/>
+              </a:rPr>
+              <a:t>Photo, Activity 2: “Workshop in Lushoto, Tanzania” by CGIAR Climate, CC BY-NC-SA 2.0, via Flickr (https://www.flickr.com/photos/55227776@N04/8551480688)</a:t>
+            </a:r>
+            <a:endParaRPr lang="en-US" sz="1800" dirty="0"/>
+          </a:p>
+          <a:p>
+            <a:pPr algn="l" marL="342900" indent="-342900">
+              <a:spcAft>
+                <a:spcPts val="800"/>
+              </a:spcAft>
+              <a:buSzPct val="100000"/>
+              <a:buChar char="•"/>
+            </a:pPr>
+            <a:r>
+              <a:rPr lang="en-US" sz="1800" dirty="0">
+                <a:solidFill>
+                  <a:srgbClr val="111111"/>
+                </a:solidFill>
+                <a:latin typeface="Calibri" pitchFamily="34" charset="0"/>
+                <a:ea typeface="Calibri" pitchFamily="34" charset="-122"/>
+                <a:cs typeface="Calibri" pitchFamily="34" charset="-120"/>
+              </a:rPr>
+              <a:t>Photo, Activity 3: “Aerial view of oil palm plantation” by CIFOR, CC BY-NC-ND 2.0, via Flickr (https://www.flickr.com/photos/45423546@N07/38802487905)</a:t>
+            </a:r>
+            <a:endParaRPr lang="en-US" sz="1800" dirty="0"/>
+          </a:p>
+          <a:p>
+            <a:pPr algn="l" marL="342900" indent="-342900">
+              <a:spcAft>
+                <a:spcPts val="800"/>
+              </a:spcAft>
+              <a:buSzPct val="100000"/>
+              <a:buChar char="•"/>
+            </a:pPr>
+            <a:r>
+              <a:rPr lang="en-US" sz="1800" dirty="0">
+                <a:solidFill>
+                  <a:srgbClr val="111111"/>
+                </a:solidFill>
+                <a:latin typeface="Calibri" pitchFamily="34" charset="0"/>
+                <a:ea typeface="Calibri" pitchFamily="34" charset="-122"/>
+                <a:cs typeface="Calibri" pitchFamily="34" charset="-120"/>
+              </a:rPr>
+              <a:t>Photo, Activity 4: “CBCF Project, Yogyakarta” by CIFOR, CC BY-NC-ND 2.0, via Flickr (https://www.flickr.com/photos/45423546@N07/35977173724)</a:t>
+            </a:r>
+            <a:endParaRPr lang="en-US" sz="1800" dirty="0"/>
+          </a:p>
+          <a:p>
+            <a:pPr algn="l" marL="342900" indent="-342900">
+              <a:spcAft>
+                <a:spcPts val="800"/>
+              </a:spcAft>
+              <a:buSzPct val="100000"/>
+              <a:buChar char="•"/>
+            </a:pPr>
+            <a:r>
+              <a:rPr lang="en-US" sz="1800" dirty="0">
+                <a:solidFill>
+                  <a:srgbClr val="111111"/>
+                </a:solidFill>
+                <a:latin typeface="Calibri" pitchFamily="34" charset="0"/>
+                <a:ea typeface="Calibri" pitchFamily="34" charset="-122"/>
+                <a:cs typeface="Calibri" pitchFamily="34" charset="-120"/>
+              </a:rPr>
+              <a:t>Photo, Activity 5: “African Bush Elephants, Maasai Mara” by Ray in Manila, CC BY 2.0, via Flickr (https://www.flickr.com/photos/21186555@N07/50627864261)</a:t>
+            </a:r>
+            <a:endParaRPr lang="en-US" sz="1800" dirty="0"/>
+          </a:p>
+          <a:p>
+            <a:pPr algn="l" marL="342900" indent="-342900">
+              <a:spcAft>
+                <a:spcPts val="800"/>
+              </a:spcAft>
+              <a:buSzPct val="100000"/>
+              <a:buChar char="•"/>
+            </a:pPr>
+            <a:r>
+              <a:rPr lang="en-US" sz="1800" dirty="0">
+                <a:solidFill>
+                  <a:srgbClr val="111111"/>
+                </a:solidFill>
+                <a:latin typeface="Calibri" pitchFamily="34" charset="0"/>
+                <a:ea typeface="Calibri" pitchFamily="34" charset="-122"/>
+                <a:cs typeface="Calibri" pitchFamily="34" charset="-120"/>
+              </a:rPr>
               <a:t>Diagrams and animations: drawn for this lesson (Geography Department).</a:t>
             </a:r>
             <a:endParaRPr lang="en-US" sz="1800" dirty="0"/>
@@ -21263,7 +21731,7 @@
             <a:pPr algn="ctr"/>
             <a:fld id="{F7021451-1387-4CA6-816F-3879F97B5CBC}" type="slidenum">
               <a:rPr b="1" lang="en-US"/>
-              <a:t>54</a:t>
+              <a:t>55</a:t>
             </a:fld>
             <a:endParaRPr lang="en-US"/>
           </a:p>

--- a/lecons/F2T/04_F2T_L1_P4_Equatorial_Human_Activities.pptx
+++ b/lecons/F2T/04_F2T_L1_P4_Equatorial_Human_Activities.pptx
@@ -3460,7 +3460,7 @@
           <a:p>
             <a:r>
               <a:rPr lang="en-US" dirty="0"/>
-              <a:t>Before we start the new lesson, let us correct the homework I gave you at the end of Lesson 1 (Part 3): The Equatorial Region: Types of Resources and Methods of Exploitation. The question was: Ask a farmer or a trader what crops come from the forest region of Cameroon. Write three food crops and two cash crops. Take out your exercise books.</a:t>
+              <a:t>Before we start the new lesson, let us correct the homework I gave you at the end of Lesson 1 (Part 3): The Equatorial Region: Types of Resources and Methods of Exploitation. The question was: Define shifting cultivation. Take out your exercise books.</a:t>
             </a:r>
             <a:endParaRPr lang="en-US" dirty="0"/>
           </a:p>
@@ -4340,7 +4340,7 @@
           <a:p>
             <a:r>
               <a:rPr lang="en-US" dirty="0"/>
-              <a:t>For your homework: Write two problems that forestry, farming or hunting cause to the forest, its animals or its rivers. We shall correct it at the beginning of our next lesson.</a:t>
+              <a:t>For your homework: Give two problems caused by man in the forest. We shall correct it at the beginning of our next lesson.</a:t>
             </a:r>
             <a:endParaRPr lang="en-US" dirty="0"/>
           </a:p>
@@ -4428,7 +4428,7 @@
           <a:p>
             <a:r>
               <a:rPr lang="en-US" dirty="0"/>
-              <a:t>Here is a good answer. Food crops: cassava, plantains, cocoyams (also maize and groundnuts). Cash crops: cocoa and coffee (also oil palm and rubber). Compare it with your own answer and correct your work in red.</a:t>
+              <a:t>Here is a good answer. It is farming a piece of forest for a few years and moving when the soil is poor. Compare it with your own answer and correct your work in red.</a:t>
             </a:r>
             <a:endParaRPr lang="en-US" dirty="0"/>
           </a:p>
@@ -15227,7 +15227,7 @@
         <p:spPr>
           <a:xfrm>
             <a:off x="0" y="658368"/>
-            <a:ext cx="2468880" cy="5833872"/>
+            <a:ext cx="5120640" cy="5833872"/>
           </a:xfrm>
           <a:prstGeom prst="rect">
             <a:avLst/>
@@ -15242,8 +15242,8 @@
         </p:nvSpPr>
         <p:spPr>
           <a:xfrm>
-            <a:off x="2697480" y="1005840"/>
-            <a:ext cx="9174175" cy="731520"/>
+            <a:off x="5349240" y="1005840"/>
+            <a:ext cx="6522415" cy="731520"/>
           </a:xfrm>
           <a:prstGeom prst="rect">
             <a:avLst/>
@@ -15283,8 +15283,8 @@
         </p:nvSpPr>
         <p:spPr>
           <a:xfrm>
-            <a:off x="2697480" y="1783080"/>
-            <a:ext cx="9174175" cy="4663440"/>
+            <a:off x="5349240" y="1783080"/>
+            <a:ext cx="6522415" cy="4663440"/>
           </a:xfrm>
           <a:prstGeom prst="rect">
             <a:avLst/>
@@ -15331,7 +15331,7 @@
                 <a:ea typeface="Times New Roman" pitchFamily="34" charset="-122"/>
                 <a:cs typeface="Times New Roman" pitchFamily="34" charset="-120"/>
               </a:rPr>
-              <a:t>Ask a farmer or a trader what crops come from the forest region of Cameroon. Write three food crops and two cash crops.</a:t>
+              <a:t>Define shifting cultivation.</a:t>
             </a:r>
             <a:endParaRPr lang="en-US" sz="4000" dirty="0"/>
           </a:p>
@@ -17761,7 +17761,7 @@
                 <a:ea typeface="Times New Roman" pitchFamily="34" charset="-122"/>
                 <a:cs typeface="Times New Roman" pitchFamily="34" charset="-120"/>
               </a:rPr>
-              <a:t>Write two problems that forestry, farming or hunting cause to the forest, its animals or its rivers.</a:t>
+              <a:t>Give two problems caused by man in the forest.</a:t>
             </a:r>
             <a:endParaRPr lang="en-US" sz="4000" dirty="0"/>
           </a:p>
@@ -17980,7 +17980,7 @@
                 <a:ea typeface="Times New Roman" pitchFamily="34" charset="-122"/>
                 <a:cs typeface="Times New Roman" pitchFamily="34" charset="-120"/>
               </a:rPr>
-              <a:t>Food crops: cassava, plantains, cocoyams (also maize and groundnuts). Cash crops: cocoa and coffee (also oil palm and rubber).</a:t>
+              <a:t>It is farming a piece of forest for a few years and moving when the soil is poor.</a:t>
             </a:r>
             <a:endParaRPr lang="en-US" sz="4000" dirty="0"/>
           </a:p>
@@ -20644,7 +20644,7 @@
                           <a:ea typeface="Calibri" pitchFamily="34" charset="-122"/>
                           <a:cs typeface="Calibri" pitchFamily="34" charset="-120"/>
                         </a:rPr>
-                        <a:t>Write two problems that forestry, farming or hunting cause to the forest, its animals or its rivers.</a:t>
+                        <a:t>Give two problems caused by man in the forest.</a:t>
                       </a:r>
                       <a:endParaRPr lang="en-US" sz="1600" dirty="0">
                         <a:latin typeface="Calibri" charset="0"/>
